--- a/papers/sekisssorcar/se_kiss_sorcar_slides.pptx
+++ b/papers/sekisssorcar/se_kiss_sorcar_slides.pptx
@@ -19,6 +19,8 @@
     <p:sldId id="267" r:id="rId18"/>
     <p:sldId id="268" r:id="rId19"/>
     <p:sldId id="269" r:id="rId20"/>
+    <p:sldId id="278" r:id="rId29"/>
+    <p:sldId id="279" r:id="rId30"/>
     <p:sldId id="270" r:id="rId21"/>
     <p:sldId id="271" r:id="rId22"/>
     <p:sldId id="272" r:id="rId23"/>
@@ -6711,7 +6713,7 @@
                 </a:solidFill>
                 <a:latin typeface="Arial"/>
               </a:rPr>
-              <a:t>15</a:t>
+              <a:t>17</a:t>
             </a:r>
           </a:p>
         </p:txBody>
@@ -7947,7 +7949,7 @@
                 </a:solidFill>
                 <a:latin typeface="Arial"/>
               </a:rPr>
-              <a:t>16</a:t>
+              <a:t>18</a:t>
             </a:r>
           </a:p>
         </p:txBody>
@@ -9542,7 +9544,7 @@
                 </a:solidFill>
                 <a:latin typeface="Arial"/>
               </a:rPr>
-              <a:t>17</a:t>
+              <a:t>19</a:t>
             </a:r>
           </a:p>
         </p:txBody>
@@ -10324,7 +10326,7 @@
                 </a:solidFill>
                 <a:latin typeface="Arial"/>
               </a:rPr>
-              <a:t>18</a:t>
+              <a:t>20</a:t>
             </a:r>
           </a:p>
         </p:txBody>
@@ -10826,7 +10828,7 @@
                 </a:solidFill>
                 <a:latin typeface="Arial"/>
               </a:rPr>
-              <a:t>19</a:t>
+              <a:t>21</a:t>
             </a:r>
           </a:p>
         </p:txBody>
@@ -11842,7 +11844,7 @@
                 </a:solidFill>
                 <a:latin typeface="Arial"/>
               </a:rPr>
-              <a:t>20</a:t>
+              <a:t>22</a:t>
             </a:r>
           </a:p>
         </p:txBody>
@@ -12376,7 +12378,7 @@
                 </a:solidFill>
                 <a:latin typeface="Arial"/>
               </a:rPr>
-              <a:t>21</a:t>
+              <a:t>23</a:t>
             </a:r>
           </a:p>
         </p:txBody>
@@ -12625,6 +12627,2874 @@
                 <a:latin typeface="Arial"/>
               </a:rPr>
               <a:t>github.com/ksenxx/kiss_ai</a:t>
+            </a:r>
+          </a:p>
+        </p:txBody>
+      </p:sp>
+    </p:spTree>
+  </p:cSld>
+  <p:clrMapOvr>
+    <a:masterClrMapping/>
+  </p:clrMapOvr>
+</p:sld>
+</file>
+
+<file path=ppt/slides/slide23.xml><?xml version="1.0" encoding="utf-8"?>
+<p:sld xmlns:a="http://schemas.openxmlformats.org/drawingml/2006/main" xmlns:p="http://schemas.openxmlformats.org/presentationml/2006/main" xmlns:r="http://schemas.openxmlformats.org/officeDocument/2006/relationships">
+  <p:cSld>
+    <p:bg>
+      <p:bgPr>
+        <a:solidFill>
+          <a:srgbClr val="F7F5EF"/>
+        </a:solidFill>
+        <a:effectLst/>
+      </p:bgPr>
+    </p:bg>
+    <p:spTree>
+      <p:nvGrpSpPr>
+        <p:cNvPr id="1" name=""/>
+        <p:cNvGrpSpPr/>
+        <p:nvPr/>
+      </p:nvGrpSpPr>
+      <p:grpSpPr/>
+      <p:sp>
+        <p:nvSpPr>
+          <p:cNvPr id="2" name="Rectangle 1"/>
+          <p:cNvSpPr/>
+          <p:nvPr/>
+        </p:nvSpPr>
+        <p:spPr>
+          <a:xfrm>
+            <a:off x="457200" y="914400"/>
+            <a:ext cx="146304" cy="502920"/>
+          </a:xfrm>
+          <a:prstGeom prst="rect">
+            <a:avLst/>
+          </a:prstGeom>
+          <a:solidFill>
+            <a:srgbClr val="FDB515"/>
+          </a:solidFill>
+          <a:ln>
+            <a:noFill/>
+          </a:ln>
+          <a:effectLst/>
+        </p:spPr>
+        <p:style>
+          <a:lnRef idx="1">
+            <a:schemeClr val="accent1"/>
+          </a:lnRef>
+          <a:fillRef idx="3">
+            <a:schemeClr val="accent1"/>
+          </a:fillRef>
+          <a:effectRef idx="2">
+            <a:schemeClr val="accent1"/>
+          </a:effectRef>
+          <a:fontRef idx="minor">
+            <a:schemeClr val="lt1"/>
+          </a:fontRef>
+        </p:style>
+        <p:txBody>
+          <a:bodyPr rtlCol="0" anchor="ctr"/>
+          <a:lstStyle/>
+          <a:p>
+            <a:pPr algn="ctr"/>
+          </a:p>
+        </p:txBody>
+      </p:sp>
+      <p:sp>
+        <p:nvSpPr>
+          <p:cNvPr id="3" name="TextBox 2"/>
+          <p:cNvSpPr txBox="1"/>
+          <p:nvPr/>
+        </p:nvSpPr>
+        <p:spPr>
+          <a:xfrm>
+            <a:off x="822960" y="502920"/>
+            <a:ext cx="10515600" cy="365760"/>
+          </a:xfrm>
+          <a:prstGeom prst="rect">
+            <a:avLst/>
+          </a:prstGeom>
+          <a:noFill/>
+        </p:spPr>
+        <p:txBody>
+          <a:bodyPr wrap="square" anchor="t" lIns="0" rIns="0" tIns="0" bIns="0">
+            <a:spAutoFit/>
+          </a:bodyPr>
+          <a:lstStyle/>
+          <a:p>
+            <a:r>
+              <a:rPr sz="1300" b="1" i="0">
+                <a:solidFill>
+                  <a:srgbClr val="C88A00"/>
+                </a:solidFill>
+                <a:latin typeface="Arial"/>
+              </a:rPr>
+              <a:t>F  R  O  M      T  H  E      L  O  G</a:t>
+            </a:r>
+          </a:p>
+        </p:txBody>
+      </p:sp>
+      <p:sp>
+        <p:nvSpPr>
+          <p:cNvPr id="4" name="TextBox 3"/>
+          <p:cNvSpPr txBox="1"/>
+          <p:nvPr/>
+        </p:nvSpPr>
+        <p:spPr>
+          <a:xfrm>
+            <a:off x="822960" y="868680"/>
+            <a:ext cx="10515600" cy="1280160"/>
+          </a:xfrm>
+          <a:prstGeom prst="rect">
+            <a:avLst/>
+          </a:prstGeom>
+          <a:noFill/>
+        </p:spPr>
+        <p:txBody>
+          <a:bodyPr wrap="square" anchor="t" lIns="0" rIns="0" tIns="0" bIns="0">
+            <a:spAutoFit/>
+          </a:bodyPr>
+          <a:lstStyle/>
+          <a:p>
+            <a:r>
+              <a:rPr sz="3400" b="1" i="0">
+                <a:solidFill>
+                  <a:srgbClr val="003262"/>
+                </a:solidFill>
+                <a:latin typeface="Arial"/>
+              </a:rPr>
+              <a:t>Verbatim user tasks — engineering</a:t>
+            </a:r>
+          </a:p>
+        </p:txBody>
+      </p:sp>
+      <p:sp>
+        <p:nvSpPr>
+          <p:cNvPr id="5" name="TextBox 4"/>
+          <p:cNvSpPr txBox="1"/>
+          <p:nvPr/>
+        </p:nvSpPr>
+        <p:spPr>
+          <a:xfrm>
+            <a:off x="822960" y="1783080"/>
+            <a:ext cx="10607040" cy="502920"/>
+          </a:xfrm>
+          <a:prstGeom prst="rect">
+            <a:avLst/>
+          </a:prstGeom>
+          <a:noFill/>
+        </p:spPr>
+        <p:txBody>
+          <a:bodyPr wrap="square" anchor="t" lIns="0" rIns="0" tIns="0" bIns="0">
+            <a:spAutoFit/>
+          </a:bodyPr>
+          <a:lstStyle/>
+          <a:p>
+            <a:pPr>
+              <a:lnSpc>
+                <a:spcPct val="112000"/>
+              </a:lnSpc>
+            </a:pPr>
+            <a:r>
+              <a:rPr sz="2100" b="0" i="0">
+                <a:solidFill>
+                  <a:srgbClr val="4A5260"/>
+                </a:solidFill>
+                <a:latin typeface="Arial"/>
+              </a:rPr>
+              <a:t>Real, unedited requests recorded in sorcar.db — short natural language, one task at a time.</a:t>
+            </a:r>
+          </a:p>
+        </p:txBody>
+      </p:sp>
+      <p:sp>
+        <p:nvSpPr>
+          <p:cNvPr id="6" name="Rectangle 5"/>
+          <p:cNvSpPr/>
+          <p:nvPr/>
+        </p:nvSpPr>
+        <p:spPr>
+          <a:xfrm>
+            <a:off x="822960" y="2377440"/>
+            <a:ext cx="5166360" cy="914400"/>
+          </a:xfrm>
+          <a:prstGeom prst="rect">
+            <a:avLst/>
+          </a:prstGeom>
+          <a:solidFill>
+            <a:srgbClr val="003262"/>
+          </a:solidFill>
+          <a:ln>
+            <a:noFill/>
+          </a:ln>
+          <a:effectLst/>
+        </p:spPr>
+        <p:style>
+          <a:lnRef idx="1">
+            <a:schemeClr val="accent1"/>
+          </a:lnRef>
+          <a:fillRef idx="3">
+            <a:schemeClr val="accent1"/>
+          </a:fillRef>
+          <a:effectRef idx="2">
+            <a:schemeClr val="accent1"/>
+          </a:effectRef>
+          <a:fontRef idx="minor">
+            <a:schemeClr val="lt1"/>
+          </a:fontRef>
+        </p:style>
+        <p:txBody>
+          <a:bodyPr rtlCol="0" anchor="ctr"/>
+          <a:lstStyle/>
+          <a:p>
+            <a:pPr algn="ctr"/>
+          </a:p>
+        </p:txBody>
+      </p:sp>
+      <p:sp>
+        <p:nvSpPr>
+          <p:cNvPr id="7" name="Rectangle 6"/>
+          <p:cNvSpPr/>
+          <p:nvPr/>
+        </p:nvSpPr>
+        <p:spPr>
+          <a:xfrm>
+            <a:off x="822960" y="2377440"/>
+            <a:ext cx="5166360" cy="91440"/>
+          </a:xfrm>
+          <a:prstGeom prst="rect">
+            <a:avLst/>
+          </a:prstGeom>
+          <a:solidFill>
+            <a:srgbClr val="FDB515"/>
+          </a:solidFill>
+          <a:ln>
+            <a:noFill/>
+          </a:ln>
+          <a:effectLst/>
+        </p:spPr>
+        <p:style>
+          <a:lnRef idx="1">
+            <a:schemeClr val="accent1"/>
+          </a:lnRef>
+          <a:fillRef idx="3">
+            <a:schemeClr val="accent1"/>
+          </a:fillRef>
+          <a:effectRef idx="2">
+            <a:schemeClr val="accent1"/>
+          </a:effectRef>
+          <a:fontRef idx="minor">
+            <a:schemeClr val="lt1"/>
+          </a:fontRef>
+        </p:style>
+        <p:txBody>
+          <a:bodyPr rtlCol="0" anchor="ctr"/>
+          <a:lstStyle/>
+          <a:p>
+            <a:pPr algn="ctr"/>
+          </a:p>
+        </p:txBody>
+      </p:sp>
+      <p:sp>
+        <p:nvSpPr>
+          <p:cNvPr id="8" name="TextBox 7"/>
+          <p:cNvSpPr txBox="1"/>
+          <p:nvPr/>
+        </p:nvSpPr>
+        <p:spPr>
+          <a:xfrm>
+            <a:off x="1097280" y="2578608"/>
+            <a:ext cx="4617720" cy="603503"/>
+          </a:xfrm>
+          <a:prstGeom prst="rect">
+            <a:avLst/>
+          </a:prstGeom>
+          <a:noFill/>
+        </p:spPr>
+        <p:txBody>
+          <a:bodyPr wrap="square" anchor="ctr" lIns="0" rIns="0" tIns="0" bIns="0">
+            <a:spAutoFit/>
+          </a:bodyPr>
+          <a:lstStyle/>
+          <a:p>
+            <a:pPr>
+              <a:spcAft>
+                <a:spcPts val="600"/>
+              </a:spcAft>
+            </a:pPr>
+            <a:r>
+              <a:rPr sz="1200" b="1" i="0">
+                <a:solidFill>
+                  <a:srgbClr val="FDB515"/>
+                </a:solidFill>
+                <a:latin typeface="Arial"/>
+              </a:rPr>
+              <a:t>TEST-FIRST BUG FIX</a:t>
+            </a:r>
+          </a:p>
+          <a:p>
+            <a:pPr>
+              <a:lnSpc>
+                <a:spcPct val="110000"/>
+              </a:lnSpc>
+            </a:pPr>
+            <a:r>
+              <a:rPr sz="1450" b="0" i="1">
+                <a:solidFill>
+                  <a:srgbClr val="FFFFFF"/>
+                </a:solidFill>
+                <a:latin typeface="Arial"/>
+              </a:rPr>
+              <a:t>“Can you reproduce the bug by writing an integration test? Then fix it.”</a:t>
+            </a:r>
+          </a:p>
+        </p:txBody>
+      </p:sp>
+      <p:sp>
+        <p:nvSpPr>
+          <p:cNvPr id="9" name="Rectangle 8"/>
+          <p:cNvSpPr/>
+          <p:nvPr/>
+        </p:nvSpPr>
+        <p:spPr>
+          <a:xfrm>
+            <a:off x="6172200" y="2377440"/>
+            <a:ext cx="5166360" cy="914400"/>
+          </a:xfrm>
+          <a:prstGeom prst="rect">
+            <a:avLst/>
+          </a:prstGeom>
+          <a:solidFill>
+            <a:srgbClr val="003262"/>
+          </a:solidFill>
+          <a:ln>
+            <a:noFill/>
+          </a:ln>
+          <a:effectLst/>
+        </p:spPr>
+        <p:style>
+          <a:lnRef idx="1">
+            <a:schemeClr val="accent1"/>
+          </a:lnRef>
+          <a:fillRef idx="3">
+            <a:schemeClr val="accent1"/>
+          </a:fillRef>
+          <a:effectRef idx="2">
+            <a:schemeClr val="accent1"/>
+          </a:effectRef>
+          <a:fontRef idx="minor">
+            <a:schemeClr val="lt1"/>
+          </a:fontRef>
+        </p:style>
+        <p:txBody>
+          <a:bodyPr rtlCol="0" anchor="ctr"/>
+          <a:lstStyle/>
+          <a:p>
+            <a:pPr algn="ctr"/>
+          </a:p>
+        </p:txBody>
+      </p:sp>
+      <p:sp>
+        <p:nvSpPr>
+          <p:cNvPr id="10" name="Rectangle 9"/>
+          <p:cNvSpPr/>
+          <p:nvPr/>
+        </p:nvSpPr>
+        <p:spPr>
+          <a:xfrm>
+            <a:off x="6172200" y="2377440"/>
+            <a:ext cx="5166360" cy="91440"/>
+          </a:xfrm>
+          <a:prstGeom prst="rect">
+            <a:avLst/>
+          </a:prstGeom>
+          <a:solidFill>
+            <a:srgbClr val="FDB515"/>
+          </a:solidFill>
+          <a:ln>
+            <a:noFill/>
+          </a:ln>
+          <a:effectLst/>
+        </p:spPr>
+        <p:style>
+          <a:lnRef idx="1">
+            <a:schemeClr val="accent1"/>
+          </a:lnRef>
+          <a:fillRef idx="3">
+            <a:schemeClr val="accent1"/>
+          </a:fillRef>
+          <a:effectRef idx="2">
+            <a:schemeClr val="accent1"/>
+          </a:effectRef>
+          <a:fontRef idx="minor">
+            <a:schemeClr val="lt1"/>
+          </a:fontRef>
+        </p:style>
+        <p:txBody>
+          <a:bodyPr rtlCol="0" anchor="ctr"/>
+          <a:lstStyle/>
+          <a:p>
+            <a:pPr algn="ctr"/>
+          </a:p>
+        </p:txBody>
+      </p:sp>
+      <p:sp>
+        <p:nvSpPr>
+          <p:cNvPr id="11" name="TextBox 10"/>
+          <p:cNvSpPr txBox="1"/>
+          <p:nvPr/>
+        </p:nvSpPr>
+        <p:spPr>
+          <a:xfrm>
+            <a:off x="6446520" y="2578608"/>
+            <a:ext cx="4617720" cy="603503"/>
+          </a:xfrm>
+          <a:prstGeom prst="rect">
+            <a:avLst/>
+          </a:prstGeom>
+          <a:noFill/>
+        </p:spPr>
+        <p:txBody>
+          <a:bodyPr wrap="square" anchor="ctr" lIns="0" rIns="0" tIns="0" bIns="0">
+            <a:spAutoFit/>
+          </a:bodyPr>
+          <a:lstStyle/>
+          <a:p>
+            <a:pPr>
+              <a:spcAft>
+                <a:spcPts val="600"/>
+              </a:spcAft>
+            </a:pPr>
+            <a:r>
+              <a:rPr sz="1200" b="1" i="0">
+                <a:solidFill>
+                  <a:srgbClr val="FDB515"/>
+                </a:solidFill>
+                <a:latin typeface="Arial"/>
+              </a:rPr>
+              <a:t>BUG REPORT</a:t>
+            </a:r>
+          </a:p>
+          <a:p>
+            <a:pPr>
+              <a:lnSpc>
+                <a:spcPct val="110000"/>
+              </a:lnSpc>
+            </a:pPr>
+            <a:r>
+              <a:rPr sz="1450" b="0" i="1">
+                <a:solidFill>
+                  <a:srgbClr val="FFFFFF"/>
+                </a:solidFill>
+                <a:latin typeface="Arial"/>
+              </a:rPr>
+              <a:t>“ask_user_question is not showing its window in the web/mobile app.”</a:t>
+            </a:r>
+          </a:p>
+        </p:txBody>
+      </p:sp>
+      <p:sp>
+        <p:nvSpPr>
+          <p:cNvPr id="12" name="Rectangle 11"/>
+          <p:cNvSpPr/>
+          <p:nvPr/>
+        </p:nvSpPr>
+        <p:spPr>
+          <a:xfrm>
+            <a:off x="822960" y="3415284"/>
+            <a:ext cx="5166360" cy="914400"/>
+          </a:xfrm>
+          <a:prstGeom prst="rect">
+            <a:avLst/>
+          </a:prstGeom>
+          <a:solidFill>
+            <a:srgbClr val="003262"/>
+          </a:solidFill>
+          <a:ln>
+            <a:noFill/>
+          </a:ln>
+          <a:effectLst/>
+        </p:spPr>
+        <p:style>
+          <a:lnRef idx="1">
+            <a:schemeClr val="accent1"/>
+          </a:lnRef>
+          <a:fillRef idx="3">
+            <a:schemeClr val="accent1"/>
+          </a:fillRef>
+          <a:effectRef idx="2">
+            <a:schemeClr val="accent1"/>
+          </a:effectRef>
+          <a:fontRef idx="minor">
+            <a:schemeClr val="lt1"/>
+          </a:fontRef>
+        </p:style>
+        <p:txBody>
+          <a:bodyPr rtlCol="0" anchor="ctr"/>
+          <a:lstStyle/>
+          <a:p>
+            <a:pPr algn="ctr"/>
+          </a:p>
+        </p:txBody>
+      </p:sp>
+      <p:sp>
+        <p:nvSpPr>
+          <p:cNvPr id="13" name="Rectangle 12"/>
+          <p:cNvSpPr/>
+          <p:nvPr/>
+        </p:nvSpPr>
+        <p:spPr>
+          <a:xfrm>
+            <a:off x="822960" y="3415284"/>
+            <a:ext cx="5166360" cy="91440"/>
+          </a:xfrm>
+          <a:prstGeom prst="rect">
+            <a:avLst/>
+          </a:prstGeom>
+          <a:solidFill>
+            <a:srgbClr val="FDB515"/>
+          </a:solidFill>
+          <a:ln>
+            <a:noFill/>
+          </a:ln>
+          <a:effectLst/>
+        </p:spPr>
+        <p:style>
+          <a:lnRef idx="1">
+            <a:schemeClr val="accent1"/>
+          </a:lnRef>
+          <a:fillRef idx="3">
+            <a:schemeClr val="accent1"/>
+          </a:fillRef>
+          <a:effectRef idx="2">
+            <a:schemeClr val="accent1"/>
+          </a:effectRef>
+          <a:fontRef idx="minor">
+            <a:schemeClr val="lt1"/>
+          </a:fontRef>
+        </p:style>
+        <p:txBody>
+          <a:bodyPr rtlCol="0" anchor="ctr"/>
+          <a:lstStyle/>
+          <a:p>
+            <a:pPr algn="ctr"/>
+          </a:p>
+        </p:txBody>
+      </p:sp>
+      <p:sp>
+        <p:nvSpPr>
+          <p:cNvPr id="14" name="TextBox 13"/>
+          <p:cNvSpPr txBox="1"/>
+          <p:nvPr/>
+        </p:nvSpPr>
+        <p:spPr>
+          <a:xfrm>
+            <a:off x="1097280" y="3616452"/>
+            <a:ext cx="4617720" cy="603503"/>
+          </a:xfrm>
+          <a:prstGeom prst="rect">
+            <a:avLst/>
+          </a:prstGeom>
+          <a:noFill/>
+        </p:spPr>
+        <p:txBody>
+          <a:bodyPr wrap="square" anchor="ctr" lIns="0" rIns="0" tIns="0" bIns="0">
+            <a:spAutoFit/>
+          </a:bodyPr>
+          <a:lstStyle/>
+          <a:p>
+            <a:pPr>
+              <a:spcAft>
+                <a:spcPts val="600"/>
+              </a:spcAft>
+            </a:pPr>
+            <a:r>
+              <a:rPr sz="1200" b="1" i="0">
+                <a:solidFill>
+                  <a:srgbClr val="FDB515"/>
+                </a:solidFill>
+                <a:latin typeface="Arial"/>
+              </a:rPr>
+              <a:t>CODE HYGIENE</a:t>
+            </a:r>
+          </a:p>
+          <a:p>
+            <a:pPr>
+              <a:lnSpc>
+                <a:spcPct val="110000"/>
+              </a:lnSpc>
+            </a:pPr>
+            <a:r>
+              <a:rPr sz="1450" b="0" i="1">
+                <a:solidFill>
+                  <a:srgbClr val="FFFFFF"/>
+                </a:solidFill>
+                <a:latin typeface="Arial"/>
+              </a:rPr>
+              <a:t>“uv run check --full and fix” — the 2nd most frequent command (50×).</a:t>
+            </a:r>
+          </a:p>
+        </p:txBody>
+      </p:sp>
+      <p:sp>
+        <p:nvSpPr>
+          <p:cNvPr id="15" name="Rectangle 14"/>
+          <p:cNvSpPr/>
+          <p:nvPr/>
+        </p:nvSpPr>
+        <p:spPr>
+          <a:xfrm>
+            <a:off x="6172200" y="3415284"/>
+            <a:ext cx="5166360" cy="914400"/>
+          </a:xfrm>
+          <a:prstGeom prst="rect">
+            <a:avLst/>
+          </a:prstGeom>
+          <a:solidFill>
+            <a:srgbClr val="003262"/>
+          </a:solidFill>
+          <a:ln>
+            <a:noFill/>
+          </a:ln>
+          <a:effectLst/>
+        </p:spPr>
+        <p:style>
+          <a:lnRef idx="1">
+            <a:schemeClr val="accent1"/>
+          </a:lnRef>
+          <a:fillRef idx="3">
+            <a:schemeClr val="accent1"/>
+          </a:fillRef>
+          <a:effectRef idx="2">
+            <a:schemeClr val="accent1"/>
+          </a:effectRef>
+          <a:fontRef idx="minor">
+            <a:schemeClr val="lt1"/>
+          </a:fontRef>
+        </p:style>
+        <p:txBody>
+          <a:bodyPr rtlCol="0" anchor="ctr"/>
+          <a:lstStyle/>
+          <a:p>
+            <a:pPr algn="ctr"/>
+          </a:p>
+        </p:txBody>
+      </p:sp>
+      <p:sp>
+        <p:nvSpPr>
+          <p:cNvPr id="16" name="Rectangle 15"/>
+          <p:cNvSpPr/>
+          <p:nvPr/>
+        </p:nvSpPr>
+        <p:spPr>
+          <a:xfrm>
+            <a:off x="6172200" y="3415284"/>
+            <a:ext cx="5166360" cy="91440"/>
+          </a:xfrm>
+          <a:prstGeom prst="rect">
+            <a:avLst/>
+          </a:prstGeom>
+          <a:solidFill>
+            <a:srgbClr val="FDB515"/>
+          </a:solidFill>
+          <a:ln>
+            <a:noFill/>
+          </a:ln>
+          <a:effectLst/>
+        </p:spPr>
+        <p:style>
+          <a:lnRef idx="1">
+            <a:schemeClr val="accent1"/>
+          </a:lnRef>
+          <a:fillRef idx="3">
+            <a:schemeClr val="accent1"/>
+          </a:fillRef>
+          <a:effectRef idx="2">
+            <a:schemeClr val="accent1"/>
+          </a:effectRef>
+          <a:fontRef idx="minor">
+            <a:schemeClr val="lt1"/>
+          </a:fontRef>
+        </p:style>
+        <p:txBody>
+          <a:bodyPr rtlCol="0" anchor="ctr"/>
+          <a:lstStyle/>
+          <a:p>
+            <a:pPr algn="ctr"/>
+          </a:p>
+        </p:txBody>
+      </p:sp>
+      <p:sp>
+        <p:nvSpPr>
+          <p:cNvPr id="17" name="TextBox 16"/>
+          <p:cNvSpPr txBox="1"/>
+          <p:nvPr/>
+        </p:nvSpPr>
+        <p:spPr>
+          <a:xfrm>
+            <a:off x="6446520" y="3616452"/>
+            <a:ext cx="4617720" cy="603503"/>
+          </a:xfrm>
+          <a:prstGeom prst="rect">
+            <a:avLst/>
+          </a:prstGeom>
+          <a:noFill/>
+        </p:spPr>
+        <p:txBody>
+          <a:bodyPr wrap="square" anchor="ctr" lIns="0" rIns="0" tIns="0" bIns="0">
+            <a:spAutoFit/>
+          </a:bodyPr>
+          <a:lstStyle/>
+          <a:p>
+            <a:pPr>
+              <a:spcAft>
+                <a:spcPts val="600"/>
+              </a:spcAft>
+            </a:pPr>
+            <a:r>
+              <a:rPr sz="1200" b="1" i="0">
+                <a:solidFill>
+                  <a:srgbClr val="FDB515"/>
+                </a:solidFill>
+                <a:latin typeface="Arial"/>
+              </a:rPr>
+              <a:t>DIRECTORY AUDIT</a:t>
+            </a:r>
+          </a:p>
+          <a:p>
+            <a:pPr>
+              <a:lnSpc>
+                <a:spcPct val="110000"/>
+              </a:lnSpc>
+            </a:pPr>
+            <a:r>
+              <a:rPr sz="1450" b="0" i="1">
+                <a:solidFill>
+                  <a:srgbClr val="FFFFFF"/>
+                </a:solidFill>
+                <a:latin typeface="Arial"/>
+              </a:rPr>
+              <a:t>“Find all bugs, redundancies, and inconsistencies in agents/vscode/.”</a:t>
+            </a:r>
+          </a:p>
+        </p:txBody>
+      </p:sp>
+      <p:sp>
+        <p:nvSpPr>
+          <p:cNvPr id="18" name="Rectangle 17"/>
+          <p:cNvSpPr/>
+          <p:nvPr/>
+        </p:nvSpPr>
+        <p:spPr>
+          <a:xfrm>
+            <a:off x="822960" y="4453128"/>
+            <a:ext cx="5166360" cy="914400"/>
+          </a:xfrm>
+          <a:prstGeom prst="rect">
+            <a:avLst/>
+          </a:prstGeom>
+          <a:solidFill>
+            <a:srgbClr val="003262"/>
+          </a:solidFill>
+          <a:ln>
+            <a:noFill/>
+          </a:ln>
+          <a:effectLst/>
+        </p:spPr>
+        <p:style>
+          <a:lnRef idx="1">
+            <a:schemeClr val="accent1"/>
+          </a:lnRef>
+          <a:fillRef idx="3">
+            <a:schemeClr val="accent1"/>
+          </a:fillRef>
+          <a:effectRef idx="2">
+            <a:schemeClr val="accent1"/>
+          </a:effectRef>
+          <a:fontRef idx="minor">
+            <a:schemeClr val="lt1"/>
+          </a:fontRef>
+        </p:style>
+        <p:txBody>
+          <a:bodyPr rtlCol="0" anchor="ctr"/>
+          <a:lstStyle/>
+          <a:p>
+            <a:pPr algn="ctr"/>
+          </a:p>
+        </p:txBody>
+      </p:sp>
+      <p:sp>
+        <p:nvSpPr>
+          <p:cNvPr id="19" name="Rectangle 18"/>
+          <p:cNvSpPr/>
+          <p:nvPr/>
+        </p:nvSpPr>
+        <p:spPr>
+          <a:xfrm>
+            <a:off x="822960" y="4453128"/>
+            <a:ext cx="5166360" cy="91440"/>
+          </a:xfrm>
+          <a:prstGeom prst="rect">
+            <a:avLst/>
+          </a:prstGeom>
+          <a:solidFill>
+            <a:srgbClr val="FDB515"/>
+          </a:solidFill>
+          <a:ln>
+            <a:noFill/>
+          </a:ln>
+          <a:effectLst/>
+        </p:spPr>
+        <p:style>
+          <a:lnRef idx="1">
+            <a:schemeClr val="accent1"/>
+          </a:lnRef>
+          <a:fillRef idx="3">
+            <a:schemeClr val="accent1"/>
+          </a:fillRef>
+          <a:effectRef idx="2">
+            <a:schemeClr val="accent1"/>
+          </a:effectRef>
+          <a:fontRef idx="minor">
+            <a:schemeClr val="lt1"/>
+          </a:fontRef>
+        </p:style>
+        <p:txBody>
+          <a:bodyPr rtlCol="0" anchor="ctr"/>
+          <a:lstStyle/>
+          <a:p>
+            <a:pPr algn="ctr"/>
+          </a:p>
+        </p:txBody>
+      </p:sp>
+      <p:sp>
+        <p:nvSpPr>
+          <p:cNvPr id="20" name="TextBox 19"/>
+          <p:cNvSpPr txBox="1"/>
+          <p:nvPr/>
+        </p:nvSpPr>
+        <p:spPr>
+          <a:xfrm>
+            <a:off x="1097280" y="4654296"/>
+            <a:ext cx="4617720" cy="603503"/>
+          </a:xfrm>
+          <a:prstGeom prst="rect">
+            <a:avLst/>
+          </a:prstGeom>
+          <a:noFill/>
+        </p:spPr>
+        <p:txBody>
+          <a:bodyPr wrap="square" anchor="ctr" lIns="0" rIns="0" tIns="0" bIns="0">
+            <a:spAutoFit/>
+          </a:bodyPr>
+          <a:lstStyle/>
+          <a:p>
+            <a:pPr>
+              <a:spcAft>
+                <a:spcPts val="600"/>
+              </a:spcAft>
+            </a:pPr>
+            <a:r>
+              <a:rPr sz="1200" b="1" i="0">
+                <a:solidFill>
+                  <a:srgbClr val="FDB515"/>
+                </a:solidFill>
+                <a:latin typeface="Arial"/>
+              </a:rPr>
+              <a:t>DEFENSIVE REVERT</a:t>
+            </a:r>
+          </a:p>
+          <a:p>
+            <a:pPr>
+              <a:lnSpc>
+                <a:spcPct val="110000"/>
+              </a:lnSpc>
+            </a:pPr>
+            <a:r>
+              <a:rPr sz="1450" b="0" i="1">
+                <a:solidFill>
+                  <a:srgbClr val="FFFFFF"/>
+                </a:solidFill>
+                <a:latin typeface="Arial"/>
+              </a:rPr>
+              <a:t>“Can you get rid of the last commit to main?” — recurs 30+ times.</a:t>
+            </a:r>
+          </a:p>
+        </p:txBody>
+      </p:sp>
+      <p:sp>
+        <p:nvSpPr>
+          <p:cNvPr id="21" name="Rectangle 20"/>
+          <p:cNvSpPr/>
+          <p:nvPr/>
+        </p:nvSpPr>
+        <p:spPr>
+          <a:xfrm>
+            <a:off x="6172200" y="4453128"/>
+            <a:ext cx="5166360" cy="914400"/>
+          </a:xfrm>
+          <a:prstGeom prst="rect">
+            <a:avLst/>
+          </a:prstGeom>
+          <a:solidFill>
+            <a:srgbClr val="003262"/>
+          </a:solidFill>
+          <a:ln>
+            <a:noFill/>
+          </a:ln>
+          <a:effectLst/>
+        </p:spPr>
+        <p:style>
+          <a:lnRef idx="1">
+            <a:schemeClr val="accent1"/>
+          </a:lnRef>
+          <a:fillRef idx="3">
+            <a:schemeClr val="accent1"/>
+          </a:fillRef>
+          <a:effectRef idx="2">
+            <a:schemeClr val="accent1"/>
+          </a:effectRef>
+          <a:fontRef idx="minor">
+            <a:schemeClr val="lt1"/>
+          </a:fontRef>
+        </p:style>
+        <p:txBody>
+          <a:bodyPr rtlCol="0" anchor="ctr"/>
+          <a:lstStyle/>
+          <a:p>
+            <a:pPr algn="ctr"/>
+          </a:p>
+        </p:txBody>
+      </p:sp>
+      <p:sp>
+        <p:nvSpPr>
+          <p:cNvPr id="22" name="Rectangle 21"/>
+          <p:cNvSpPr/>
+          <p:nvPr/>
+        </p:nvSpPr>
+        <p:spPr>
+          <a:xfrm>
+            <a:off x="6172200" y="4453128"/>
+            <a:ext cx="5166360" cy="91440"/>
+          </a:xfrm>
+          <a:prstGeom prst="rect">
+            <a:avLst/>
+          </a:prstGeom>
+          <a:solidFill>
+            <a:srgbClr val="FDB515"/>
+          </a:solidFill>
+          <a:ln>
+            <a:noFill/>
+          </a:ln>
+          <a:effectLst/>
+        </p:spPr>
+        <p:style>
+          <a:lnRef idx="1">
+            <a:schemeClr val="accent1"/>
+          </a:lnRef>
+          <a:fillRef idx="3">
+            <a:schemeClr val="accent1"/>
+          </a:fillRef>
+          <a:effectRef idx="2">
+            <a:schemeClr val="accent1"/>
+          </a:effectRef>
+          <a:fontRef idx="minor">
+            <a:schemeClr val="lt1"/>
+          </a:fontRef>
+        </p:style>
+        <p:txBody>
+          <a:bodyPr rtlCol="0" anchor="ctr"/>
+          <a:lstStyle/>
+          <a:p>
+            <a:pPr algn="ctr"/>
+          </a:p>
+        </p:txBody>
+      </p:sp>
+      <p:sp>
+        <p:nvSpPr>
+          <p:cNvPr id="23" name="TextBox 22"/>
+          <p:cNvSpPr txBox="1"/>
+          <p:nvPr/>
+        </p:nvSpPr>
+        <p:spPr>
+          <a:xfrm>
+            <a:off x="6446520" y="4654296"/>
+            <a:ext cx="4617720" cy="603503"/>
+          </a:xfrm>
+          <a:prstGeom prst="rect">
+            <a:avLst/>
+          </a:prstGeom>
+          <a:noFill/>
+        </p:spPr>
+        <p:txBody>
+          <a:bodyPr wrap="square" anchor="ctr" lIns="0" rIns="0" tIns="0" bIns="0">
+            <a:spAutoFit/>
+          </a:bodyPr>
+          <a:lstStyle/>
+          <a:p>
+            <a:pPr>
+              <a:spcAft>
+                <a:spcPts val="600"/>
+              </a:spcAft>
+            </a:pPr>
+            <a:r>
+              <a:rPr sz="1200" b="1" i="0">
+                <a:solidFill>
+                  <a:srgbClr val="FDB515"/>
+                </a:solidFill>
+                <a:latin typeface="Arial"/>
+              </a:rPr>
+              <a:t>ITERATIVE FEATURE</a:t>
+            </a:r>
+          </a:p>
+          <a:p>
+            <a:pPr>
+              <a:lnSpc>
+                <a:spcPct val="110000"/>
+              </a:lnSpc>
+            </a:pPr>
+            <a:r>
+              <a:rPr sz="1450" b="0" i="1">
+                <a:solidFill>
+                  <a:srgbClr val="FFFFFF"/>
+                </a:solidFill>
+                <a:latin typeface="Arial"/>
+              </a:rPr>
+              <a:t>“Let the user access KISS Sorcar from any device with a browser.”</a:t>
+            </a:r>
+          </a:p>
+        </p:txBody>
+      </p:sp>
+      <p:sp>
+        <p:nvSpPr>
+          <p:cNvPr id="24" name="Rectangle 23"/>
+          <p:cNvSpPr/>
+          <p:nvPr/>
+        </p:nvSpPr>
+        <p:spPr>
+          <a:xfrm>
+            <a:off x="822960" y="5490972"/>
+            <a:ext cx="5166360" cy="914400"/>
+          </a:xfrm>
+          <a:prstGeom prst="rect">
+            <a:avLst/>
+          </a:prstGeom>
+          <a:solidFill>
+            <a:srgbClr val="003262"/>
+          </a:solidFill>
+          <a:ln>
+            <a:noFill/>
+          </a:ln>
+          <a:effectLst/>
+        </p:spPr>
+        <p:style>
+          <a:lnRef idx="1">
+            <a:schemeClr val="accent1"/>
+          </a:lnRef>
+          <a:fillRef idx="3">
+            <a:schemeClr val="accent1"/>
+          </a:fillRef>
+          <a:effectRef idx="2">
+            <a:schemeClr val="accent1"/>
+          </a:effectRef>
+          <a:fontRef idx="minor">
+            <a:schemeClr val="lt1"/>
+          </a:fontRef>
+        </p:style>
+        <p:txBody>
+          <a:bodyPr rtlCol="0" anchor="ctr"/>
+          <a:lstStyle/>
+          <a:p>
+            <a:pPr algn="ctr"/>
+          </a:p>
+        </p:txBody>
+      </p:sp>
+      <p:sp>
+        <p:nvSpPr>
+          <p:cNvPr id="25" name="Rectangle 24"/>
+          <p:cNvSpPr/>
+          <p:nvPr/>
+        </p:nvSpPr>
+        <p:spPr>
+          <a:xfrm>
+            <a:off x="822960" y="5490972"/>
+            <a:ext cx="5166360" cy="91440"/>
+          </a:xfrm>
+          <a:prstGeom prst="rect">
+            <a:avLst/>
+          </a:prstGeom>
+          <a:solidFill>
+            <a:srgbClr val="FDB515"/>
+          </a:solidFill>
+          <a:ln>
+            <a:noFill/>
+          </a:ln>
+          <a:effectLst/>
+        </p:spPr>
+        <p:style>
+          <a:lnRef idx="1">
+            <a:schemeClr val="accent1"/>
+          </a:lnRef>
+          <a:fillRef idx="3">
+            <a:schemeClr val="accent1"/>
+          </a:fillRef>
+          <a:effectRef idx="2">
+            <a:schemeClr val="accent1"/>
+          </a:effectRef>
+          <a:fontRef idx="minor">
+            <a:schemeClr val="lt1"/>
+          </a:fontRef>
+        </p:style>
+        <p:txBody>
+          <a:bodyPr rtlCol="0" anchor="ctr"/>
+          <a:lstStyle/>
+          <a:p>
+            <a:pPr algn="ctr"/>
+          </a:p>
+        </p:txBody>
+      </p:sp>
+      <p:sp>
+        <p:nvSpPr>
+          <p:cNvPr id="26" name="TextBox 25"/>
+          <p:cNvSpPr txBox="1"/>
+          <p:nvPr/>
+        </p:nvSpPr>
+        <p:spPr>
+          <a:xfrm>
+            <a:off x="1097280" y="5692140"/>
+            <a:ext cx="4617720" cy="603503"/>
+          </a:xfrm>
+          <a:prstGeom prst="rect">
+            <a:avLst/>
+          </a:prstGeom>
+          <a:noFill/>
+        </p:spPr>
+        <p:txBody>
+          <a:bodyPr wrap="square" anchor="ctr" lIns="0" rIns="0" tIns="0" bIns="0">
+            <a:spAutoFit/>
+          </a:bodyPr>
+          <a:lstStyle/>
+          <a:p>
+            <a:pPr>
+              <a:spcAft>
+                <a:spcPts val="600"/>
+              </a:spcAft>
+            </a:pPr>
+            <a:r>
+              <a:rPr sz="1200" b="1" i="0">
+                <a:solidFill>
+                  <a:srgbClr val="FDB515"/>
+                </a:solidFill>
+                <a:latin typeface="Arial"/>
+              </a:rPr>
+              <a:t>INVESTIGATE FIRST</a:t>
+            </a:r>
+          </a:p>
+          <a:p>
+            <a:pPr>
+              <a:lnSpc>
+                <a:spcPct val="110000"/>
+              </a:lnSpc>
+            </a:pPr>
+            <a:r>
+              <a:rPr sz="1450" b="0" i="1">
+                <a:solidFill>
+                  <a:srgbClr val="FFFFFF"/>
+                </a:solidFill>
+                <a:latin typeface="Arial"/>
+              </a:rPr>
+              <a:t>“Show me the detailed step-by-step workflow of web_server.py.”</a:t>
+            </a:r>
+          </a:p>
+        </p:txBody>
+      </p:sp>
+      <p:sp>
+        <p:nvSpPr>
+          <p:cNvPr id="27" name="Rectangle 26"/>
+          <p:cNvSpPr/>
+          <p:nvPr/>
+        </p:nvSpPr>
+        <p:spPr>
+          <a:xfrm>
+            <a:off x="6172200" y="5490972"/>
+            <a:ext cx="5166360" cy="914400"/>
+          </a:xfrm>
+          <a:prstGeom prst="rect">
+            <a:avLst/>
+          </a:prstGeom>
+          <a:solidFill>
+            <a:srgbClr val="003262"/>
+          </a:solidFill>
+          <a:ln>
+            <a:noFill/>
+          </a:ln>
+          <a:effectLst/>
+        </p:spPr>
+        <p:style>
+          <a:lnRef idx="1">
+            <a:schemeClr val="accent1"/>
+          </a:lnRef>
+          <a:fillRef idx="3">
+            <a:schemeClr val="accent1"/>
+          </a:fillRef>
+          <a:effectRef idx="2">
+            <a:schemeClr val="accent1"/>
+          </a:effectRef>
+          <a:fontRef idx="minor">
+            <a:schemeClr val="lt1"/>
+          </a:fontRef>
+        </p:style>
+        <p:txBody>
+          <a:bodyPr rtlCol="0" anchor="ctr"/>
+          <a:lstStyle/>
+          <a:p>
+            <a:pPr algn="ctr"/>
+          </a:p>
+        </p:txBody>
+      </p:sp>
+      <p:sp>
+        <p:nvSpPr>
+          <p:cNvPr id="28" name="Rectangle 27"/>
+          <p:cNvSpPr/>
+          <p:nvPr/>
+        </p:nvSpPr>
+        <p:spPr>
+          <a:xfrm>
+            <a:off x="6172200" y="5490972"/>
+            <a:ext cx="5166360" cy="91440"/>
+          </a:xfrm>
+          <a:prstGeom prst="rect">
+            <a:avLst/>
+          </a:prstGeom>
+          <a:solidFill>
+            <a:srgbClr val="FDB515"/>
+          </a:solidFill>
+          <a:ln>
+            <a:noFill/>
+          </a:ln>
+          <a:effectLst/>
+        </p:spPr>
+        <p:style>
+          <a:lnRef idx="1">
+            <a:schemeClr val="accent1"/>
+          </a:lnRef>
+          <a:fillRef idx="3">
+            <a:schemeClr val="accent1"/>
+          </a:fillRef>
+          <a:effectRef idx="2">
+            <a:schemeClr val="accent1"/>
+          </a:effectRef>
+          <a:fontRef idx="minor">
+            <a:schemeClr val="lt1"/>
+          </a:fontRef>
+        </p:style>
+        <p:txBody>
+          <a:bodyPr rtlCol="0" anchor="ctr"/>
+          <a:lstStyle/>
+          <a:p>
+            <a:pPr algn="ctr"/>
+          </a:p>
+        </p:txBody>
+      </p:sp>
+      <p:sp>
+        <p:nvSpPr>
+          <p:cNvPr id="29" name="TextBox 28"/>
+          <p:cNvSpPr txBox="1"/>
+          <p:nvPr/>
+        </p:nvSpPr>
+        <p:spPr>
+          <a:xfrm>
+            <a:off x="6446520" y="5692140"/>
+            <a:ext cx="4617720" cy="603503"/>
+          </a:xfrm>
+          <a:prstGeom prst="rect">
+            <a:avLst/>
+          </a:prstGeom>
+          <a:noFill/>
+        </p:spPr>
+        <p:txBody>
+          <a:bodyPr wrap="square" anchor="ctr" lIns="0" rIns="0" tIns="0" bIns="0">
+            <a:spAutoFit/>
+          </a:bodyPr>
+          <a:lstStyle/>
+          <a:p>
+            <a:pPr>
+              <a:spcAft>
+                <a:spcPts val="600"/>
+              </a:spcAft>
+            </a:pPr>
+            <a:r>
+              <a:rPr sz="1200" b="1" i="0">
+                <a:solidFill>
+                  <a:srgbClr val="FDB515"/>
+                </a:solidFill>
+                <a:latin typeface="Arial"/>
+              </a:rPr>
+              <a:t>PROMPT ENGINEERING</a:t>
+            </a:r>
+          </a:p>
+          <a:p>
+            <a:pPr>
+              <a:lnSpc>
+                <a:spcPct val="110000"/>
+              </a:lnSpc>
+            </a:pPr>
+            <a:r>
+              <a:rPr sz="1450" b="0" i="1">
+                <a:solidFill>
+                  <a:srgbClr val="FFFFFF"/>
+                </a:solidFill>
+                <a:latin typeface="Arial"/>
+              </a:rPr>
+              <a:t>“Which SYSTEM.md instructions were not followed yesterday? Fix them.”</a:t>
+            </a:r>
+          </a:p>
+        </p:txBody>
+      </p:sp>
+      <p:sp>
+        <p:nvSpPr>
+          <p:cNvPr id="30" name="Rectangle 29"/>
+          <p:cNvSpPr/>
+          <p:nvPr/>
+        </p:nvSpPr>
+        <p:spPr>
+          <a:xfrm>
+            <a:off x="0" y="6510528"/>
+            <a:ext cx="12188952" cy="27432"/>
+          </a:xfrm>
+          <a:prstGeom prst="rect">
+            <a:avLst/>
+          </a:prstGeom>
+          <a:solidFill>
+            <a:srgbClr val="E9E5D8"/>
+          </a:solidFill>
+          <a:ln>
+            <a:noFill/>
+          </a:ln>
+          <a:effectLst/>
+        </p:spPr>
+        <p:style>
+          <a:lnRef idx="1">
+            <a:schemeClr val="accent1"/>
+          </a:lnRef>
+          <a:fillRef idx="3">
+            <a:schemeClr val="accent1"/>
+          </a:fillRef>
+          <a:effectRef idx="2">
+            <a:schemeClr val="accent1"/>
+          </a:effectRef>
+          <a:fontRef idx="minor">
+            <a:schemeClr val="lt1"/>
+          </a:fontRef>
+        </p:style>
+        <p:txBody>
+          <a:bodyPr rtlCol="0" anchor="ctr"/>
+          <a:lstStyle/>
+          <a:p>
+            <a:pPr algn="ctr"/>
+          </a:p>
+        </p:txBody>
+      </p:sp>
+      <p:sp>
+        <p:nvSpPr>
+          <p:cNvPr id="31" name="TextBox 30"/>
+          <p:cNvSpPr txBox="1"/>
+          <p:nvPr/>
+        </p:nvSpPr>
+        <p:spPr>
+          <a:xfrm>
+            <a:off x="822960" y="6547104"/>
+            <a:ext cx="8229600" cy="274320"/>
+          </a:xfrm>
+          <a:prstGeom prst="rect">
+            <a:avLst/>
+          </a:prstGeom>
+          <a:noFill/>
+        </p:spPr>
+        <p:txBody>
+          <a:bodyPr wrap="square" anchor="t" lIns="0" rIns="0" tIns="0" bIns="0">
+            <a:spAutoFit/>
+          </a:bodyPr>
+          <a:lstStyle/>
+          <a:p>
+            <a:r>
+              <a:rPr sz="1100" b="0" i="0">
+                <a:solidFill>
+                  <a:srgbClr val="4A5260"/>
+                </a:solidFill>
+                <a:latin typeface="Arial"/>
+              </a:rPr>
+              <a:t>KISS Sorcar  ·  K. Sen, UC Berkeley</a:t>
+            </a:r>
+          </a:p>
+        </p:txBody>
+      </p:sp>
+      <p:sp>
+        <p:nvSpPr>
+          <p:cNvPr id="32" name="TextBox 31"/>
+          <p:cNvSpPr txBox="1"/>
+          <p:nvPr/>
+        </p:nvSpPr>
+        <p:spPr>
+          <a:xfrm>
+            <a:off x="10058400" y="6547104"/>
+            <a:ext cx="1307592" cy="274320"/>
+          </a:xfrm>
+          <a:prstGeom prst="rect">
+            <a:avLst/>
+          </a:prstGeom>
+          <a:noFill/>
+        </p:spPr>
+        <p:txBody>
+          <a:bodyPr wrap="square" anchor="t" lIns="0" rIns="0" tIns="0" bIns="0">
+            <a:spAutoFit/>
+          </a:bodyPr>
+          <a:lstStyle/>
+          <a:p>
+            <a:pPr algn="r"/>
+            <a:r>
+              <a:rPr sz="1100" b="1" i="0">
+                <a:solidFill>
+                  <a:srgbClr val="C88A00"/>
+                </a:solidFill>
+                <a:latin typeface="Arial"/>
+              </a:rPr>
+              <a:t>15</a:t>
+            </a:r>
+          </a:p>
+        </p:txBody>
+      </p:sp>
+    </p:spTree>
+  </p:cSld>
+  <p:clrMapOvr>
+    <a:masterClrMapping/>
+  </p:clrMapOvr>
+</p:sld>
+</file>
+
+<file path=ppt/slides/slide24.xml><?xml version="1.0" encoding="utf-8"?>
+<p:sld xmlns:a="http://schemas.openxmlformats.org/drawingml/2006/main" xmlns:p="http://schemas.openxmlformats.org/presentationml/2006/main" xmlns:r="http://schemas.openxmlformats.org/officeDocument/2006/relationships">
+  <p:cSld>
+    <p:bg>
+      <p:bgPr>
+        <a:solidFill>
+          <a:srgbClr val="F7F5EF"/>
+        </a:solidFill>
+        <a:effectLst/>
+      </p:bgPr>
+    </p:bg>
+    <p:spTree>
+      <p:nvGrpSpPr>
+        <p:cNvPr id="1" name=""/>
+        <p:cNvGrpSpPr/>
+        <p:nvPr/>
+      </p:nvGrpSpPr>
+      <p:grpSpPr/>
+      <p:sp>
+        <p:nvSpPr>
+          <p:cNvPr id="2" name="Rectangle 1"/>
+          <p:cNvSpPr/>
+          <p:nvPr/>
+        </p:nvSpPr>
+        <p:spPr>
+          <a:xfrm>
+            <a:off x="457200" y="914400"/>
+            <a:ext cx="146304" cy="502920"/>
+          </a:xfrm>
+          <a:prstGeom prst="rect">
+            <a:avLst/>
+          </a:prstGeom>
+          <a:solidFill>
+            <a:srgbClr val="FDB515"/>
+          </a:solidFill>
+          <a:ln>
+            <a:noFill/>
+          </a:ln>
+          <a:effectLst/>
+        </p:spPr>
+        <p:style>
+          <a:lnRef idx="1">
+            <a:schemeClr val="accent1"/>
+          </a:lnRef>
+          <a:fillRef idx="3">
+            <a:schemeClr val="accent1"/>
+          </a:fillRef>
+          <a:effectRef idx="2">
+            <a:schemeClr val="accent1"/>
+          </a:effectRef>
+          <a:fontRef idx="minor">
+            <a:schemeClr val="lt1"/>
+          </a:fontRef>
+        </p:style>
+        <p:txBody>
+          <a:bodyPr rtlCol="0" anchor="ctr"/>
+          <a:lstStyle/>
+          <a:p>
+            <a:pPr algn="ctr"/>
+          </a:p>
+        </p:txBody>
+      </p:sp>
+      <p:sp>
+        <p:nvSpPr>
+          <p:cNvPr id="3" name="TextBox 2"/>
+          <p:cNvSpPr txBox="1"/>
+          <p:nvPr/>
+        </p:nvSpPr>
+        <p:spPr>
+          <a:xfrm>
+            <a:off x="822960" y="502920"/>
+            <a:ext cx="10515600" cy="365760"/>
+          </a:xfrm>
+          <a:prstGeom prst="rect">
+            <a:avLst/>
+          </a:prstGeom>
+          <a:noFill/>
+        </p:spPr>
+        <p:txBody>
+          <a:bodyPr wrap="square" anchor="t" lIns="0" rIns="0" tIns="0" bIns="0">
+            <a:spAutoFit/>
+          </a:bodyPr>
+          <a:lstStyle/>
+          <a:p>
+            <a:r>
+              <a:rPr sz="1300" b="1" i="0">
+                <a:solidFill>
+                  <a:srgbClr val="C88A00"/>
+                </a:solidFill>
+                <a:latin typeface="Arial"/>
+              </a:rPr>
+              <a:t>F  R  O  M      T  H  E      L  O  G</a:t>
+            </a:r>
+          </a:p>
+        </p:txBody>
+      </p:sp>
+      <p:sp>
+        <p:nvSpPr>
+          <p:cNvPr id="4" name="TextBox 3"/>
+          <p:cNvSpPr txBox="1"/>
+          <p:nvPr/>
+        </p:nvSpPr>
+        <p:spPr>
+          <a:xfrm>
+            <a:off x="822960" y="868680"/>
+            <a:ext cx="10515600" cy="1280160"/>
+          </a:xfrm>
+          <a:prstGeom prst="rect">
+            <a:avLst/>
+          </a:prstGeom>
+          <a:noFill/>
+        </p:spPr>
+        <p:txBody>
+          <a:bodyPr wrap="square" anchor="t" lIns="0" rIns="0" tIns="0" bIns="0">
+            <a:spAutoFit/>
+          </a:bodyPr>
+          <a:lstStyle/>
+          <a:p>
+            <a:r>
+              <a:rPr sz="3400" b="1" i="0">
+                <a:solidFill>
+                  <a:srgbClr val="003262"/>
+                </a:solidFill>
+                <a:latin typeface="Arial"/>
+              </a:rPr>
+              <a:t>Verbatim user tasks — general assistance</a:t>
+            </a:r>
+          </a:p>
+        </p:txBody>
+      </p:sp>
+      <p:sp>
+        <p:nvSpPr>
+          <p:cNvPr id="5" name="TextBox 4"/>
+          <p:cNvSpPr txBox="1"/>
+          <p:nvPr/>
+        </p:nvSpPr>
+        <p:spPr>
+          <a:xfrm>
+            <a:off x="822960" y="1783080"/>
+            <a:ext cx="10607040" cy="502920"/>
+          </a:xfrm>
+          <a:prstGeom prst="rect">
+            <a:avLst/>
+          </a:prstGeom>
+          <a:noFill/>
+        </p:spPr>
+        <p:txBody>
+          <a:bodyPr wrap="square" anchor="t" lIns="0" rIns="0" tIns="0" bIns="0">
+            <a:spAutoFit/>
+          </a:bodyPr>
+          <a:lstStyle/>
+          <a:p>
+            <a:pPr>
+              <a:lnSpc>
+                <a:spcPct val="112000"/>
+              </a:lnSpc>
+            </a:pPr>
+            <a:r>
+              <a:rPr sz="2100" b="0" i="0">
+                <a:solidFill>
+                  <a:srgbClr val="4A5260"/>
+                </a:solidFill>
+                <a:latin typeface="Arial"/>
+              </a:rPr>
+              <a:t>The same agent, prompt, and architecture handle everything beyond code.</a:t>
+            </a:r>
+          </a:p>
+        </p:txBody>
+      </p:sp>
+      <p:sp>
+        <p:nvSpPr>
+          <p:cNvPr id="6" name="Rectangle 5"/>
+          <p:cNvSpPr/>
+          <p:nvPr/>
+        </p:nvSpPr>
+        <p:spPr>
+          <a:xfrm>
+            <a:off x="822960" y="2377440"/>
+            <a:ext cx="5166360" cy="914400"/>
+          </a:xfrm>
+          <a:prstGeom prst="rect">
+            <a:avLst/>
+          </a:prstGeom>
+          <a:solidFill>
+            <a:srgbClr val="003262"/>
+          </a:solidFill>
+          <a:ln>
+            <a:noFill/>
+          </a:ln>
+          <a:effectLst/>
+        </p:spPr>
+        <p:style>
+          <a:lnRef idx="1">
+            <a:schemeClr val="accent1"/>
+          </a:lnRef>
+          <a:fillRef idx="3">
+            <a:schemeClr val="accent1"/>
+          </a:fillRef>
+          <a:effectRef idx="2">
+            <a:schemeClr val="accent1"/>
+          </a:effectRef>
+          <a:fontRef idx="minor">
+            <a:schemeClr val="lt1"/>
+          </a:fontRef>
+        </p:style>
+        <p:txBody>
+          <a:bodyPr rtlCol="0" anchor="ctr"/>
+          <a:lstStyle/>
+          <a:p>
+            <a:pPr algn="ctr"/>
+          </a:p>
+        </p:txBody>
+      </p:sp>
+      <p:sp>
+        <p:nvSpPr>
+          <p:cNvPr id="7" name="Rectangle 6"/>
+          <p:cNvSpPr/>
+          <p:nvPr/>
+        </p:nvSpPr>
+        <p:spPr>
+          <a:xfrm>
+            <a:off x="822960" y="2377440"/>
+            <a:ext cx="5166360" cy="91440"/>
+          </a:xfrm>
+          <a:prstGeom prst="rect">
+            <a:avLst/>
+          </a:prstGeom>
+          <a:solidFill>
+            <a:srgbClr val="FDB515"/>
+          </a:solidFill>
+          <a:ln>
+            <a:noFill/>
+          </a:ln>
+          <a:effectLst/>
+        </p:spPr>
+        <p:style>
+          <a:lnRef idx="1">
+            <a:schemeClr val="accent1"/>
+          </a:lnRef>
+          <a:fillRef idx="3">
+            <a:schemeClr val="accent1"/>
+          </a:fillRef>
+          <a:effectRef idx="2">
+            <a:schemeClr val="accent1"/>
+          </a:effectRef>
+          <a:fontRef idx="minor">
+            <a:schemeClr val="lt1"/>
+          </a:fontRef>
+        </p:style>
+        <p:txBody>
+          <a:bodyPr rtlCol="0" anchor="ctr"/>
+          <a:lstStyle/>
+          <a:p>
+            <a:pPr algn="ctr"/>
+          </a:p>
+        </p:txBody>
+      </p:sp>
+      <p:sp>
+        <p:nvSpPr>
+          <p:cNvPr id="8" name="TextBox 7"/>
+          <p:cNvSpPr txBox="1"/>
+          <p:nvPr/>
+        </p:nvSpPr>
+        <p:spPr>
+          <a:xfrm>
+            <a:off x="1097280" y="2578608"/>
+            <a:ext cx="4617720" cy="603503"/>
+          </a:xfrm>
+          <a:prstGeom prst="rect">
+            <a:avLst/>
+          </a:prstGeom>
+          <a:noFill/>
+        </p:spPr>
+        <p:txBody>
+          <a:bodyPr wrap="square" anchor="ctr" lIns="0" rIns="0" tIns="0" bIns="0">
+            <a:spAutoFit/>
+          </a:bodyPr>
+          <a:lstStyle/>
+          <a:p>
+            <a:pPr>
+              <a:spcAft>
+                <a:spcPts val="600"/>
+              </a:spcAft>
+            </a:pPr>
+            <a:r>
+              <a:rPr sz="1200" b="1" i="0">
+                <a:solidFill>
+                  <a:srgbClr val="FDB515"/>
+                </a:solidFill>
+                <a:latin typeface="Arial"/>
+              </a:rPr>
+              <a:t>SMART HOME</a:t>
+            </a:r>
+          </a:p>
+          <a:p>
+            <a:pPr>
+              <a:lnSpc>
+                <a:spcPct val="110000"/>
+              </a:lnSpc>
+            </a:pPr>
+            <a:r>
+              <a:rPr sz="1450" b="0" i="1">
+                <a:solidFill>
+                  <a:srgbClr val="FFFFFF"/>
+                </a:solidFill>
+                <a:latin typeface="Arial"/>
+              </a:rPr>
+              <a:t>“Turn off the living room and family room lights.” (Govee API)</a:t>
+            </a:r>
+          </a:p>
+        </p:txBody>
+      </p:sp>
+      <p:sp>
+        <p:nvSpPr>
+          <p:cNvPr id="9" name="Rectangle 8"/>
+          <p:cNvSpPr/>
+          <p:nvPr/>
+        </p:nvSpPr>
+        <p:spPr>
+          <a:xfrm>
+            <a:off x="6172200" y="2377440"/>
+            <a:ext cx="5166360" cy="914400"/>
+          </a:xfrm>
+          <a:prstGeom prst="rect">
+            <a:avLst/>
+          </a:prstGeom>
+          <a:solidFill>
+            <a:srgbClr val="003262"/>
+          </a:solidFill>
+          <a:ln>
+            <a:noFill/>
+          </a:ln>
+          <a:effectLst/>
+        </p:spPr>
+        <p:style>
+          <a:lnRef idx="1">
+            <a:schemeClr val="accent1"/>
+          </a:lnRef>
+          <a:fillRef idx="3">
+            <a:schemeClr val="accent1"/>
+          </a:fillRef>
+          <a:effectRef idx="2">
+            <a:schemeClr val="accent1"/>
+          </a:effectRef>
+          <a:fontRef idx="minor">
+            <a:schemeClr val="lt1"/>
+          </a:fontRef>
+        </p:style>
+        <p:txBody>
+          <a:bodyPr rtlCol="0" anchor="ctr"/>
+          <a:lstStyle/>
+          <a:p>
+            <a:pPr algn="ctr"/>
+          </a:p>
+        </p:txBody>
+      </p:sp>
+      <p:sp>
+        <p:nvSpPr>
+          <p:cNvPr id="10" name="Rectangle 9"/>
+          <p:cNvSpPr/>
+          <p:nvPr/>
+        </p:nvSpPr>
+        <p:spPr>
+          <a:xfrm>
+            <a:off x="6172200" y="2377440"/>
+            <a:ext cx="5166360" cy="91440"/>
+          </a:xfrm>
+          <a:prstGeom prst="rect">
+            <a:avLst/>
+          </a:prstGeom>
+          <a:solidFill>
+            <a:srgbClr val="FDB515"/>
+          </a:solidFill>
+          <a:ln>
+            <a:noFill/>
+          </a:ln>
+          <a:effectLst/>
+        </p:spPr>
+        <p:style>
+          <a:lnRef idx="1">
+            <a:schemeClr val="accent1"/>
+          </a:lnRef>
+          <a:fillRef idx="3">
+            <a:schemeClr val="accent1"/>
+          </a:fillRef>
+          <a:effectRef idx="2">
+            <a:schemeClr val="accent1"/>
+          </a:effectRef>
+          <a:fontRef idx="minor">
+            <a:schemeClr val="lt1"/>
+          </a:fontRef>
+        </p:style>
+        <p:txBody>
+          <a:bodyPr rtlCol="0" anchor="ctr"/>
+          <a:lstStyle/>
+          <a:p>
+            <a:pPr algn="ctr"/>
+          </a:p>
+        </p:txBody>
+      </p:sp>
+      <p:sp>
+        <p:nvSpPr>
+          <p:cNvPr id="11" name="TextBox 10"/>
+          <p:cNvSpPr txBox="1"/>
+          <p:nvPr/>
+        </p:nvSpPr>
+        <p:spPr>
+          <a:xfrm>
+            <a:off x="6446520" y="2578608"/>
+            <a:ext cx="4617720" cy="603503"/>
+          </a:xfrm>
+          <a:prstGeom prst="rect">
+            <a:avLst/>
+          </a:prstGeom>
+          <a:noFill/>
+        </p:spPr>
+        <p:txBody>
+          <a:bodyPr wrap="square" anchor="ctr" lIns="0" rIns="0" tIns="0" bIns="0">
+            <a:spAutoFit/>
+          </a:bodyPr>
+          <a:lstStyle/>
+          <a:p>
+            <a:pPr>
+              <a:spcAft>
+                <a:spcPts val="600"/>
+              </a:spcAft>
+            </a:pPr>
+            <a:r>
+              <a:rPr sz="1200" b="1" i="0">
+                <a:solidFill>
+                  <a:srgbClr val="FDB515"/>
+                </a:solidFill>
+                <a:latin typeface="Arial"/>
+              </a:rPr>
+              <a:t>TRAVEL</a:t>
+            </a:r>
+          </a:p>
+          <a:p>
+            <a:pPr>
+              <a:lnSpc>
+                <a:spcPct val="110000"/>
+              </a:lnSpc>
+            </a:pPr>
+            <a:r>
+              <a:rPr sz="1450" b="0" i="1">
+                <a:solidFill>
+                  <a:srgbClr val="FFFFFF"/>
+                </a:solidFill>
+                <a:latin typeface="Arial"/>
+              </a:rPr>
+              <a:t>“Plan me a trip to Yosemite” — with hotel availability checks.</a:t>
+            </a:r>
+          </a:p>
+        </p:txBody>
+      </p:sp>
+      <p:sp>
+        <p:nvSpPr>
+          <p:cNvPr id="12" name="Rectangle 11"/>
+          <p:cNvSpPr/>
+          <p:nvPr/>
+        </p:nvSpPr>
+        <p:spPr>
+          <a:xfrm>
+            <a:off x="822960" y="3415284"/>
+            <a:ext cx="5166360" cy="914400"/>
+          </a:xfrm>
+          <a:prstGeom prst="rect">
+            <a:avLst/>
+          </a:prstGeom>
+          <a:solidFill>
+            <a:srgbClr val="003262"/>
+          </a:solidFill>
+          <a:ln>
+            <a:noFill/>
+          </a:ln>
+          <a:effectLst/>
+        </p:spPr>
+        <p:style>
+          <a:lnRef idx="1">
+            <a:schemeClr val="accent1"/>
+          </a:lnRef>
+          <a:fillRef idx="3">
+            <a:schemeClr val="accent1"/>
+          </a:fillRef>
+          <a:effectRef idx="2">
+            <a:schemeClr val="accent1"/>
+          </a:effectRef>
+          <a:fontRef idx="minor">
+            <a:schemeClr val="lt1"/>
+          </a:fontRef>
+        </p:style>
+        <p:txBody>
+          <a:bodyPr rtlCol="0" anchor="ctr"/>
+          <a:lstStyle/>
+          <a:p>
+            <a:pPr algn="ctr"/>
+          </a:p>
+        </p:txBody>
+      </p:sp>
+      <p:sp>
+        <p:nvSpPr>
+          <p:cNvPr id="13" name="Rectangle 12"/>
+          <p:cNvSpPr/>
+          <p:nvPr/>
+        </p:nvSpPr>
+        <p:spPr>
+          <a:xfrm>
+            <a:off x="822960" y="3415284"/>
+            <a:ext cx="5166360" cy="91440"/>
+          </a:xfrm>
+          <a:prstGeom prst="rect">
+            <a:avLst/>
+          </a:prstGeom>
+          <a:solidFill>
+            <a:srgbClr val="FDB515"/>
+          </a:solidFill>
+          <a:ln>
+            <a:noFill/>
+          </a:ln>
+          <a:effectLst/>
+        </p:spPr>
+        <p:style>
+          <a:lnRef idx="1">
+            <a:schemeClr val="accent1"/>
+          </a:lnRef>
+          <a:fillRef idx="3">
+            <a:schemeClr val="accent1"/>
+          </a:fillRef>
+          <a:effectRef idx="2">
+            <a:schemeClr val="accent1"/>
+          </a:effectRef>
+          <a:fontRef idx="minor">
+            <a:schemeClr val="lt1"/>
+          </a:fontRef>
+        </p:style>
+        <p:txBody>
+          <a:bodyPr rtlCol="0" anchor="ctr"/>
+          <a:lstStyle/>
+          <a:p>
+            <a:pPr algn="ctr"/>
+          </a:p>
+        </p:txBody>
+      </p:sp>
+      <p:sp>
+        <p:nvSpPr>
+          <p:cNvPr id="14" name="TextBox 13"/>
+          <p:cNvSpPr txBox="1"/>
+          <p:nvPr/>
+        </p:nvSpPr>
+        <p:spPr>
+          <a:xfrm>
+            <a:off x="1097280" y="3616452"/>
+            <a:ext cx="4617720" cy="603503"/>
+          </a:xfrm>
+          <a:prstGeom prst="rect">
+            <a:avLst/>
+          </a:prstGeom>
+          <a:noFill/>
+        </p:spPr>
+        <p:txBody>
+          <a:bodyPr wrap="square" anchor="ctr" lIns="0" rIns="0" tIns="0" bIns="0">
+            <a:spAutoFit/>
+          </a:bodyPr>
+          <a:lstStyle/>
+          <a:p>
+            <a:pPr>
+              <a:spcAft>
+                <a:spcPts val="600"/>
+              </a:spcAft>
+            </a:pPr>
+            <a:r>
+              <a:rPr sz="1200" b="1" i="0">
+                <a:solidFill>
+                  <a:srgbClr val="FDB515"/>
+                </a:solidFill>
+                <a:latin typeface="Arial"/>
+              </a:rPr>
+              <a:t>WEATHER</a:t>
+            </a:r>
+          </a:p>
+          <a:p>
+            <a:pPr>
+              <a:lnSpc>
+                <a:spcPct val="110000"/>
+              </a:lnSpc>
+            </a:pPr>
+            <a:r>
+              <a:rPr sz="1450" b="0" i="1">
+                <a:solidFill>
+                  <a:srgbClr val="FFFFFF"/>
+                </a:solidFill>
+                <a:latin typeface="Arial"/>
+              </a:rPr>
+              <a:t>“How is the weather today?” — answered from live sources, never stale data.</a:t>
+            </a:r>
+          </a:p>
+        </p:txBody>
+      </p:sp>
+      <p:sp>
+        <p:nvSpPr>
+          <p:cNvPr id="15" name="Rectangle 14"/>
+          <p:cNvSpPr/>
+          <p:nvPr/>
+        </p:nvSpPr>
+        <p:spPr>
+          <a:xfrm>
+            <a:off x="6172200" y="3415284"/>
+            <a:ext cx="5166360" cy="914400"/>
+          </a:xfrm>
+          <a:prstGeom prst="rect">
+            <a:avLst/>
+          </a:prstGeom>
+          <a:solidFill>
+            <a:srgbClr val="003262"/>
+          </a:solidFill>
+          <a:ln>
+            <a:noFill/>
+          </a:ln>
+          <a:effectLst/>
+        </p:spPr>
+        <p:style>
+          <a:lnRef idx="1">
+            <a:schemeClr val="accent1"/>
+          </a:lnRef>
+          <a:fillRef idx="3">
+            <a:schemeClr val="accent1"/>
+          </a:fillRef>
+          <a:effectRef idx="2">
+            <a:schemeClr val="accent1"/>
+          </a:effectRef>
+          <a:fontRef idx="minor">
+            <a:schemeClr val="lt1"/>
+          </a:fontRef>
+        </p:style>
+        <p:txBody>
+          <a:bodyPr rtlCol="0" anchor="ctr"/>
+          <a:lstStyle/>
+          <a:p>
+            <a:pPr algn="ctr"/>
+          </a:p>
+        </p:txBody>
+      </p:sp>
+      <p:sp>
+        <p:nvSpPr>
+          <p:cNvPr id="16" name="Rectangle 15"/>
+          <p:cNvSpPr/>
+          <p:nvPr/>
+        </p:nvSpPr>
+        <p:spPr>
+          <a:xfrm>
+            <a:off x="6172200" y="3415284"/>
+            <a:ext cx="5166360" cy="91440"/>
+          </a:xfrm>
+          <a:prstGeom prst="rect">
+            <a:avLst/>
+          </a:prstGeom>
+          <a:solidFill>
+            <a:srgbClr val="FDB515"/>
+          </a:solidFill>
+          <a:ln>
+            <a:noFill/>
+          </a:ln>
+          <a:effectLst/>
+        </p:spPr>
+        <p:style>
+          <a:lnRef idx="1">
+            <a:schemeClr val="accent1"/>
+          </a:lnRef>
+          <a:fillRef idx="3">
+            <a:schemeClr val="accent1"/>
+          </a:fillRef>
+          <a:effectRef idx="2">
+            <a:schemeClr val="accent1"/>
+          </a:effectRef>
+          <a:fontRef idx="minor">
+            <a:schemeClr val="lt1"/>
+          </a:fontRef>
+        </p:style>
+        <p:txBody>
+          <a:bodyPr rtlCol="0" anchor="ctr"/>
+          <a:lstStyle/>
+          <a:p>
+            <a:pPr algn="ctr"/>
+          </a:p>
+        </p:txBody>
+      </p:sp>
+      <p:sp>
+        <p:nvSpPr>
+          <p:cNvPr id="17" name="TextBox 16"/>
+          <p:cNvSpPr txBox="1"/>
+          <p:nvPr/>
+        </p:nvSpPr>
+        <p:spPr>
+          <a:xfrm>
+            <a:off x="6446520" y="3616452"/>
+            <a:ext cx="4617720" cy="603503"/>
+          </a:xfrm>
+          <a:prstGeom prst="rect">
+            <a:avLst/>
+          </a:prstGeom>
+          <a:noFill/>
+        </p:spPr>
+        <p:txBody>
+          <a:bodyPr wrap="square" anchor="ctr" lIns="0" rIns="0" tIns="0" bIns="0">
+            <a:spAutoFit/>
+          </a:bodyPr>
+          <a:lstStyle/>
+          <a:p>
+            <a:pPr>
+              <a:spcAft>
+                <a:spcPts val="600"/>
+              </a:spcAft>
+            </a:pPr>
+            <a:r>
+              <a:rPr sz="1200" b="1" i="0">
+                <a:solidFill>
+                  <a:srgbClr val="FDB515"/>
+                </a:solidFill>
+                <a:latin typeface="Arial"/>
+              </a:rPr>
+              <a:t>SHOPPING</a:t>
+            </a:r>
+          </a:p>
+          <a:p>
+            <a:pPr>
+              <a:lnSpc>
+                <a:spcPct val="110000"/>
+              </a:lnSpc>
+            </a:pPr>
+            <a:r>
+              <a:rPr sz="1450" b="0" i="1">
+                <a:solidFill>
+                  <a:srgbClr val="FFFFFF"/>
+                </a:solidFill>
+                <a:latin typeface="Arial"/>
+              </a:rPr>
+              <a:t>“Where can I find Darjeeling tea in the Bay Area?”</a:t>
+            </a:r>
+          </a:p>
+        </p:txBody>
+      </p:sp>
+      <p:sp>
+        <p:nvSpPr>
+          <p:cNvPr id="18" name="Rectangle 17"/>
+          <p:cNvSpPr/>
+          <p:nvPr/>
+        </p:nvSpPr>
+        <p:spPr>
+          <a:xfrm>
+            <a:off x="822960" y="4453128"/>
+            <a:ext cx="5166360" cy="914400"/>
+          </a:xfrm>
+          <a:prstGeom prst="rect">
+            <a:avLst/>
+          </a:prstGeom>
+          <a:solidFill>
+            <a:srgbClr val="003262"/>
+          </a:solidFill>
+          <a:ln>
+            <a:noFill/>
+          </a:ln>
+          <a:effectLst/>
+        </p:spPr>
+        <p:style>
+          <a:lnRef idx="1">
+            <a:schemeClr val="accent1"/>
+          </a:lnRef>
+          <a:fillRef idx="3">
+            <a:schemeClr val="accent1"/>
+          </a:fillRef>
+          <a:effectRef idx="2">
+            <a:schemeClr val="accent1"/>
+          </a:effectRef>
+          <a:fontRef idx="minor">
+            <a:schemeClr val="lt1"/>
+          </a:fontRef>
+        </p:style>
+        <p:txBody>
+          <a:bodyPr rtlCol="0" anchor="ctr"/>
+          <a:lstStyle/>
+          <a:p>
+            <a:pPr algn="ctr"/>
+          </a:p>
+        </p:txBody>
+      </p:sp>
+      <p:sp>
+        <p:nvSpPr>
+          <p:cNvPr id="19" name="Rectangle 18"/>
+          <p:cNvSpPr/>
+          <p:nvPr/>
+        </p:nvSpPr>
+        <p:spPr>
+          <a:xfrm>
+            <a:off x="822960" y="4453128"/>
+            <a:ext cx="5166360" cy="91440"/>
+          </a:xfrm>
+          <a:prstGeom prst="rect">
+            <a:avLst/>
+          </a:prstGeom>
+          <a:solidFill>
+            <a:srgbClr val="FDB515"/>
+          </a:solidFill>
+          <a:ln>
+            <a:noFill/>
+          </a:ln>
+          <a:effectLst/>
+        </p:spPr>
+        <p:style>
+          <a:lnRef idx="1">
+            <a:schemeClr val="accent1"/>
+          </a:lnRef>
+          <a:fillRef idx="3">
+            <a:schemeClr val="accent1"/>
+          </a:fillRef>
+          <a:effectRef idx="2">
+            <a:schemeClr val="accent1"/>
+          </a:effectRef>
+          <a:fontRef idx="minor">
+            <a:schemeClr val="lt1"/>
+          </a:fontRef>
+        </p:style>
+        <p:txBody>
+          <a:bodyPr rtlCol="0" anchor="ctr"/>
+          <a:lstStyle/>
+          <a:p>
+            <a:pPr algn="ctr"/>
+          </a:p>
+        </p:txBody>
+      </p:sp>
+      <p:sp>
+        <p:nvSpPr>
+          <p:cNvPr id="20" name="TextBox 19"/>
+          <p:cNvSpPr txBox="1"/>
+          <p:nvPr/>
+        </p:nvSpPr>
+        <p:spPr>
+          <a:xfrm>
+            <a:off x="1097280" y="4654296"/>
+            <a:ext cx="4617720" cy="603503"/>
+          </a:xfrm>
+          <a:prstGeom prst="rect">
+            <a:avLst/>
+          </a:prstGeom>
+          <a:noFill/>
+        </p:spPr>
+        <p:txBody>
+          <a:bodyPr wrap="square" anchor="ctr" lIns="0" rIns="0" tIns="0" bIns="0">
+            <a:spAutoFit/>
+          </a:bodyPr>
+          <a:lstStyle/>
+          <a:p>
+            <a:pPr>
+              <a:spcAft>
+                <a:spcPts val="600"/>
+              </a:spcAft>
+            </a:pPr>
+            <a:r>
+              <a:rPr sz="1200" b="1" i="0">
+                <a:solidFill>
+                  <a:srgbClr val="FDB515"/>
+                </a:solidFill>
+                <a:latin typeface="Arial"/>
+              </a:rPr>
+              <a:t>FINANCE</a:t>
+            </a:r>
+          </a:p>
+          <a:p>
+            <a:pPr>
+              <a:lnSpc>
+                <a:spcPct val="110000"/>
+              </a:lnSpc>
+            </a:pPr>
+            <a:r>
+              <a:rPr sz="1450" b="0" i="1">
+                <a:solidFill>
+                  <a:srgbClr val="FFFFFF"/>
+                </a:solidFill>
+                <a:latin typeface="Arial"/>
+              </a:rPr>
+              <a:t>“Will Microsoft stock increase by August 2026?” — plus ETF analysis.</a:t>
+            </a:r>
+          </a:p>
+        </p:txBody>
+      </p:sp>
+      <p:sp>
+        <p:nvSpPr>
+          <p:cNvPr id="21" name="Rectangle 20"/>
+          <p:cNvSpPr/>
+          <p:nvPr/>
+        </p:nvSpPr>
+        <p:spPr>
+          <a:xfrm>
+            <a:off x="6172200" y="4453128"/>
+            <a:ext cx="5166360" cy="914400"/>
+          </a:xfrm>
+          <a:prstGeom prst="rect">
+            <a:avLst/>
+          </a:prstGeom>
+          <a:solidFill>
+            <a:srgbClr val="003262"/>
+          </a:solidFill>
+          <a:ln>
+            <a:noFill/>
+          </a:ln>
+          <a:effectLst/>
+        </p:spPr>
+        <p:style>
+          <a:lnRef idx="1">
+            <a:schemeClr val="accent1"/>
+          </a:lnRef>
+          <a:fillRef idx="3">
+            <a:schemeClr val="accent1"/>
+          </a:fillRef>
+          <a:effectRef idx="2">
+            <a:schemeClr val="accent1"/>
+          </a:effectRef>
+          <a:fontRef idx="minor">
+            <a:schemeClr val="lt1"/>
+          </a:fontRef>
+        </p:style>
+        <p:txBody>
+          <a:bodyPr rtlCol="0" anchor="ctr"/>
+          <a:lstStyle/>
+          <a:p>
+            <a:pPr algn="ctr"/>
+          </a:p>
+        </p:txBody>
+      </p:sp>
+      <p:sp>
+        <p:nvSpPr>
+          <p:cNvPr id="22" name="Rectangle 21"/>
+          <p:cNvSpPr/>
+          <p:nvPr/>
+        </p:nvSpPr>
+        <p:spPr>
+          <a:xfrm>
+            <a:off x="6172200" y="4453128"/>
+            <a:ext cx="5166360" cy="91440"/>
+          </a:xfrm>
+          <a:prstGeom prst="rect">
+            <a:avLst/>
+          </a:prstGeom>
+          <a:solidFill>
+            <a:srgbClr val="FDB515"/>
+          </a:solidFill>
+          <a:ln>
+            <a:noFill/>
+          </a:ln>
+          <a:effectLst/>
+        </p:spPr>
+        <p:style>
+          <a:lnRef idx="1">
+            <a:schemeClr val="accent1"/>
+          </a:lnRef>
+          <a:fillRef idx="3">
+            <a:schemeClr val="accent1"/>
+          </a:fillRef>
+          <a:effectRef idx="2">
+            <a:schemeClr val="accent1"/>
+          </a:effectRef>
+          <a:fontRef idx="minor">
+            <a:schemeClr val="lt1"/>
+          </a:fontRef>
+        </p:style>
+        <p:txBody>
+          <a:bodyPr rtlCol="0" anchor="ctr"/>
+          <a:lstStyle/>
+          <a:p>
+            <a:pPr algn="ctr"/>
+          </a:p>
+        </p:txBody>
+      </p:sp>
+      <p:sp>
+        <p:nvSpPr>
+          <p:cNvPr id="23" name="TextBox 22"/>
+          <p:cNvSpPr txBox="1"/>
+          <p:nvPr/>
+        </p:nvSpPr>
+        <p:spPr>
+          <a:xfrm>
+            <a:off x="6446520" y="4654296"/>
+            <a:ext cx="4617720" cy="603503"/>
+          </a:xfrm>
+          <a:prstGeom prst="rect">
+            <a:avLst/>
+          </a:prstGeom>
+          <a:noFill/>
+        </p:spPr>
+        <p:txBody>
+          <a:bodyPr wrap="square" anchor="ctr" lIns="0" rIns="0" tIns="0" bIns="0">
+            <a:spAutoFit/>
+          </a:bodyPr>
+          <a:lstStyle/>
+          <a:p>
+            <a:pPr>
+              <a:spcAft>
+                <a:spcPts val="600"/>
+              </a:spcAft>
+            </a:pPr>
+            <a:r>
+              <a:rPr sz="1200" b="1" i="0">
+                <a:solidFill>
+                  <a:srgbClr val="FDB515"/>
+                </a:solidFill>
+                <a:latin typeface="Arial"/>
+              </a:rPr>
+              <a:t>COMMUNICATION</a:t>
+            </a:r>
+          </a:p>
+          <a:p>
+            <a:pPr>
+              <a:lnSpc>
+                <a:spcPct val="110000"/>
+              </a:lnSpc>
+            </a:pPr>
+            <a:r>
+              <a:rPr sz="1450" b="0" i="1">
+                <a:solidFill>
+                  <a:srgbClr val="FFFFFF"/>
+                </a:solidFill>
+                <a:latin typeface="Arial"/>
+              </a:rPr>
+              <a:t>Slack, iMessage, and Gmail messages — sent through third-party agents.</a:t>
+            </a:r>
+          </a:p>
+        </p:txBody>
+      </p:sp>
+      <p:sp>
+        <p:nvSpPr>
+          <p:cNvPr id="24" name="Rectangle 23"/>
+          <p:cNvSpPr/>
+          <p:nvPr/>
+        </p:nvSpPr>
+        <p:spPr>
+          <a:xfrm>
+            <a:off x="822960" y="5490972"/>
+            <a:ext cx="5166360" cy="914400"/>
+          </a:xfrm>
+          <a:prstGeom prst="rect">
+            <a:avLst/>
+          </a:prstGeom>
+          <a:solidFill>
+            <a:srgbClr val="003262"/>
+          </a:solidFill>
+          <a:ln>
+            <a:noFill/>
+          </a:ln>
+          <a:effectLst/>
+        </p:spPr>
+        <p:style>
+          <a:lnRef idx="1">
+            <a:schemeClr val="accent1"/>
+          </a:lnRef>
+          <a:fillRef idx="3">
+            <a:schemeClr val="accent1"/>
+          </a:fillRef>
+          <a:effectRef idx="2">
+            <a:schemeClr val="accent1"/>
+          </a:effectRef>
+          <a:fontRef idx="minor">
+            <a:schemeClr val="lt1"/>
+          </a:fontRef>
+        </p:style>
+        <p:txBody>
+          <a:bodyPr rtlCol="0" anchor="ctr"/>
+          <a:lstStyle/>
+          <a:p>
+            <a:pPr algn="ctr"/>
+          </a:p>
+        </p:txBody>
+      </p:sp>
+      <p:sp>
+        <p:nvSpPr>
+          <p:cNvPr id="25" name="Rectangle 24"/>
+          <p:cNvSpPr/>
+          <p:nvPr/>
+        </p:nvSpPr>
+        <p:spPr>
+          <a:xfrm>
+            <a:off x="822960" y="5490972"/>
+            <a:ext cx="5166360" cy="91440"/>
+          </a:xfrm>
+          <a:prstGeom prst="rect">
+            <a:avLst/>
+          </a:prstGeom>
+          <a:solidFill>
+            <a:srgbClr val="FDB515"/>
+          </a:solidFill>
+          <a:ln>
+            <a:noFill/>
+          </a:ln>
+          <a:effectLst/>
+        </p:spPr>
+        <p:style>
+          <a:lnRef idx="1">
+            <a:schemeClr val="accent1"/>
+          </a:lnRef>
+          <a:fillRef idx="3">
+            <a:schemeClr val="accent1"/>
+          </a:fillRef>
+          <a:effectRef idx="2">
+            <a:schemeClr val="accent1"/>
+          </a:effectRef>
+          <a:fontRef idx="minor">
+            <a:schemeClr val="lt1"/>
+          </a:fontRef>
+        </p:style>
+        <p:txBody>
+          <a:bodyPr rtlCol="0" anchor="ctr"/>
+          <a:lstStyle/>
+          <a:p>
+            <a:pPr algn="ctr"/>
+          </a:p>
+        </p:txBody>
+      </p:sp>
+      <p:sp>
+        <p:nvSpPr>
+          <p:cNvPr id="26" name="TextBox 25"/>
+          <p:cNvSpPr txBox="1"/>
+          <p:nvPr/>
+        </p:nvSpPr>
+        <p:spPr>
+          <a:xfrm>
+            <a:off x="1097280" y="5692140"/>
+            <a:ext cx="4617720" cy="603503"/>
+          </a:xfrm>
+          <a:prstGeom prst="rect">
+            <a:avLst/>
+          </a:prstGeom>
+          <a:noFill/>
+        </p:spPr>
+        <p:txBody>
+          <a:bodyPr wrap="square" anchor="ctr" lIns="0" rIns="0" tIns="0" bIns="0">
+            <a:spAutoFit/>
+          </a:bodyPr>
+          <a:lstStyle/>
+          <a:p>
+            <a:pPr>
+              <a:spcAft>
+                <a:spcPts val="600"/>
+              </a:spcAft>
+            </a:pPr>
+            <a:r>
+              <a:rPr sz="1200" b="1" i="0">
+                <a:solidFill>
+                  <a:srgbClr val="FDB515"/>
+                </a:solidFill>
+                <a:latin typeface="Arial"/>
+              </a:rPr>
+              <a:t>SELF-SETUP</a:t>
+            </a:r>
+          </a:p>
+          <a:p>
+            <a:pPr>
+              <a:lnSpc>
+                <a:spcPct val="110000"/>
+              </a:lnSpc>
+            </a:pPr>
+            <a:r>
+              <a:rPr sz="1450" b="0" i="1">
+                <a:solidFill>
+                  <a:srgbClr val="FFFFFF"/>
+                </a:solidFill>
+                <a:latin typeface="Arial"/>
+              </a:rPr>
+              <a:t>“Authenticate with govee.com so you can control the lights.”</a:t>
+            </a:r>
+          </a:p>
+        </p:txBody>
+      </p:sp>
+      <p:sp>
+        <p:nvSpPr>
+          <p:cNvPr id="27" name="Rectangle 26"/>
+          <p:cNvSpPr/>
+          <p:nvPr/>
+        </p:nvSpPr>
+        <p:spPr>
+          <a:xfrm>
+            <a:off x="6172200" y="5490972"/>
+            <a:ext cx="5166360" cy="914400"/>
+          </a:xfrm>
+          <a:prstGeom prst="rect">
+            <a:avLst/>
+          </a:prstGeom>
+          <a:solidFill>
+            <a:srgbClr val="003262"/>
+          </a:solidFill>
+          <a:ln>
+            <a:noFill/>
+          </a:ln>
+          <a:effectLst/>
+        </p:spPr>
+        <p:style>
+          <a:lnRef idx="1">
+            <a:schemeClr val="accent1"/>
+          </a:lnRef>
+          <a:fillRef idx="3">
+            <a:schemeClr val="accent1"/>
+          </a:fillRef>
+          <a:effectRef idx="2">
+            <a:schemeClr val="accent1"/>
+          </a:effectRef>
+          <a:fontRef idx="minor">
+            <a:schemeClr val="lt1"/>
+          </a:fontRef>
+        </p:style>
+        <p:txBody>
+          <a:bodyPr rtlCol="0" anchor="ctr"/>
+          <a:lstStyle/>
+          <a:p>
+            <a:pPr algn="ctr"/>
+          </a:p>
+        </p:txBody>
+      </p:sp>
+      <p:sp>
+        <p:nvSpPr>
+          <p:cNvPr id="28" name="Rectangle 27"/>
+          <p:cNvSpPr/>
+          <p:nvPr/>
+        </p:nvSpPr>
+        <p:spPr>
+          <a:xfrm>
+            <a:off x="6172200" y="5490972"/>
+            <a:ext cx="5166360" cy="91440"/>
+          </a:xfrm>
+          <a:prstGeom prst="rect">
+            <a:avLst/>
+          </a:prstGeom>
+          <a:solidFill>
+            <a:srgbClr val="FDB515"/>
+          </a:solidFill>
+          <a:ln>
+            <a:noFill/>
+          </a:ln>
+          <a:effectLst/>
+        </p:spPr>
+        <p:style>
+          <a:lnRef idx="1">
+            <a:schemeClr val="accent1"/>
+          </a:lnRef>
+          <a:fillRef idx="3">
+            <a:schemeClr val="accent1"/>
+          </a:fillRef>
+          <a:effectRef idx="2">
+            <a:schemeClr val="accent1"/>
+          </a:effectRef>
+          <a:fontRef idx="minor">
+            <a:schemeClr val="lt1"/>
+          </a:fontRef>
+        </p:style>
+        <p:txBody>
+          <a:bodyPr rtlCol="0" anchor="ctr"/>
+          <a:lstStyle/>
+          <a:p>
+            <a:pPr algn="ctr"/>
+          </a:p>
+        </p:txBody>
+      </p:sp>
+      <p:sp>
+        <p:nvSpPr>
+          <p:cNvPr id="29" name="TextBox 28"/>
+          <p:cNvSpPr txBox="1"/>
+          <p:nvPr/>
+        </p:nvSpPr>
+        <p:spPr>
+          <a:xfrm>
+            <a:off x="6446520" y="5692140"/>
+            <a:ext cx="4617720" cy="603503"/>
+          </a:xfrm>
+          <a:prstGeom prst="rect">
+            <a:avLst/>
+          </a:prstGeom>
+          <a:noFill/>
+        </p:spPr>
+        <p:txBody>
+          <a:bodyPr wrap="square" anchor="ctr" lIns="0" rIns="0" tIns="0" bIns="0">
+            <a:spAutoFit/>
+          </a:bodyPr>
+          <a:lstStyle/>
+          <a:p>
+            <a:pPr>
+              <a:spcAft>
+                <a:spcPts val="600"/>
+              </a:spcAft>
+            </a:pPr>
+            <a:r>
+              <a:rPr sz="1200" b="1" i="0">
+                <a:solidFill>
+                  <a:srgbClr val="FDB515"/>
+                </a:solidFill>
+                <a:latin typeface="Arial"/>
+              </a:rPr>
+              <a:t>ETHICAL REFUSAL</a:t>
+            </a:r>
+          </a:p>
+          <a:p>
+            <a:pPr>
+              <a:lnSpc>
+                <a:spcPct val="110000"/>
+              </a:lnSpc>
+            </a:pPr>
+            <a:r>
+              <a:rPr sz="1450" b="0" i="1">
+                <a:solidFill>
+                  <a:srgbClr val="FFFFFF"/>
+                </a:solidFill>
+                <a:latin typeface="Arial"/>
+              </a:rPr>
+              <a:t>An unethical hacking request — refused, with five legitimate alternatives.</a:t>
+            </a:r>
+          </a:p>
+        </p:txBody>
+      </p:sp>
+      <p:sp>
+        <p:nvSpPr>
+          <p:cNvPr id="30" name="Rectangle 29"/>
+          <p:cNvSpPr/>
+          <p:nvPr/>
+        </p:nvSpPr>
+        <p:spPr>
+          <a:xfrm>
+            <a:off x="0" y="6510528"/>
+            <a:ext cx="12188952" cy="27432"/>
+          </a:xfrm>
+          <a:prstGeom prst="rect">
+            <a:avLst/>
+          </a:prstGeom>
+          <a:solidFill>
+            <a:srgbClr val="E9E5D8"/>
+          </a:solidFill>
+          <a:ln>
+            <a:noFill/>
+          </a:ln>
+          <a:effectLst/>
+        </p:spPr>
+        <p:style>
+          <a:lnRef idx="1">
+            <a:schemeClr val="accent1"/>
+          </a:lnRef>
+          <a:fillRef idx="3">
+            <a:schemeClr val="accent1"/>
+          </a:fillRef>
+          <a:effectRef idx="2">
+            <a:schemeClr val="accent1"/>
+          </a:effectRef>
+          <a:fontRef idx="minor">
+            <a:schemeClr val="lt1"/>
+          </a:fontRef>
+        </p:style>
+        <p:txBody>
+          <a:bodyPr rtlCol="0" anchor="ctr"/>
+          <a:lstStyle/>
+          <a:p>
+            <a:pPr algn="ctr"/>
+          </a:p>
+        </p:txBody>
+      </p:sp>
+      <p:sp>
+        <p:nvSpPr>
+          <p:cNvPr id="31" name="TextBox 30"/>
+          <p:cNvSpPr txBox="1"/>
+          <p:nvPr/>
+        </p:nvSpPr>
+        <p:spPr>
+          <a:xfrm>
+            <a:off x="822960" y="6547104"/>
+            <a:ext cx="8229600" cy="274320"/>
+          </a:xfrm>
+          <a:prstGeom prst="rect">
+            <a:avLst/>
+          </a:prstGeom>
+          <a:noFill/>
+        </p:spPr>
+        <p:txBody>
+          <a:bodyPr wrap="square" anchor="t" lIns="0" rIns="0" tIns="0" bIns="0">
+            <a:spAutoFit/>
+          </a:bodyPr>
+          <a:lstStyle/>
+          <a:p>
+            <a:r>
+              <a:rPr sz="1100" b="0" i="0">
+                <a:solidFill>
+                  <a:srgbClr val="4A5260"/>
+                </a:solidFill>
+                <a:latin typeface="Arial"/>
+              </a:rPr>
+              <a:t>KISS Sorcar  ·  K. Sen, UC Berkeley</a:t>
+            </a:r>
+          </a:p>
+        </p:txBody>
+      </p:sp>
+      <p:sp>
+        <p:nvSpPr>
+          <p:cNvPr id="32" name="TextBox 31"/>
+          <p:cNvSpPr txBox="1"/>
+          <p:nvPr/>
+        </p:nvSpPr>
+        <p:spPr>
+          <a:xfrm>
+            <a:off x="10058400" y="6547104"/>
+            <a:ext cx="1307592" cy="274320"/>
+          </a:xfrm>
+          <a:prstGeom prst="rect">
+            <a:avLst/>
+          </a:prstGeom>
+          <a:noFill/>
+        </p:spPr>
+        <p:txBody>
+          <a:bodyPr wrap="square" anchor="t" lIns="0" rIns="0" tIns="0" bIns="0">
+            <a:spAutoFit/>
+          </a:bodyPr>
+          <a:lstStyle/>
+          <a:p>
+            <a:pPr algn="r"/>
+            <a:r>
+              <a:rPr sz="1100" b="1" i="0">
+                <a:solidFill>
+                  <a:srgbClr val="C88A00"/>
+                </a:solidFill>
+                <a:latin typeface="Arial"/>
+              </a:rPr>
+              <a:t>16</a:t>
             </a:r>
           </a:p>
         </p:txBody>

--- a/papers/sekisssorcar/se_kiss_sorcar_slides.pptx
+++ b/papers/sekisssorcar/se_kiss_sorcar_slides.pptx
@@ -328,7 +328,7 @@
           <a:p>
             <a:fld id="{5BCAD085-E8A6-8845-BD4E-CB4CCA059FC4}" type="datetimeFigureOut">
               <a:rPr lang="en-US" smtClean="0"/>
-              <a:t>6/9/26</a:t>
+              <a:t>6/12/26</a:t>
             </a:fld>
             <a:endParaRPr lang="en-US"/>
           </a:p>
@@ -496,7 +496,7 @@
           <a:p>
             <a:fld id="{5BCAD085-E8A6-8845-BD4E-CB4CCA059FC4}" type="datetimeFigureOut">
               <a:rPr lang="en-US" smtClean="0"/>
-              <a:t>6/9/26</a:t>
+              <a:t>6/12/26</a:t>
             </a:fld>
             <a:endParaRPr lang="en-US"/>
           </a:p>
@@ -674,7 +674,7 @@
           <a:p>
             <a:fld id="{5BCAD085-E8A6-8845-BD4E-CB4CCA059FC4}" type="datetimeFigureOut">
               <a:rPr lang="en-US" smtClean="0"/>
-              <a:t>6/9/26</a:t>
+              <a:t>6/12/26</a:t>
             </a:fld>
             <a:endParaRPr lang="en-US"/>
           </a:p>
@@ -842,7 +842,7 @@
           <a:p>
             <a:fld id="{5BCAD085-E8A6-8845-BD4E-CB4CCA059FC4}" type="datetimeFigureOut">
               <a:rPr lang="en-US" smtClean="0"/>
-              <a:t>6/9/26</a:t>
+              <a:t>6/12/26</a:t>
             </a:fld>
             <a:endParaRPr lang="en-US"/>
           </a:p>
@@ -1087,7 +1087,7 @@
           <a:p>
             <a:fld id="{5BCAD085-E8A6-8845-BD4E-CB4CCA059FC4}" type="datetimeFigureOut">
               <a:rPr lang="en-US" smtClean="0"/>
-              <a:t>6/9/26</a:t>
+              <a:t>6/12/26</a:t>
             </a:fld>
             <a:endParaRPr lang="en-US"/>
           </a:p>
@@ -1372,7 +1372,7 @@
           <a:p>
             <a:fld id="{5BCAD085-E8A6-8845-BD4E-CB4CCA059FC4}" type="datetimeFigureOut">
               <a:rPr lang="en-US" smtClean="0"/>
-              <a:t>6/9/26</a:t>
+              <a:t>6/12/26</a:t>
             </a:fld>
             <a:endParaRPr lang="en-US"/>
           </a:p>
@@ -1791,7 +1791,7 @@
           <a:p>
             <a:fld id="{5BCAD085-E8A6-8845-BD4E-CB4CCA059FC4}" type="datetimeFigureOut">
               <a:rPr lang="en-US" smtClean="0"/>
-              <a:t>6/9/26</a:t>
+              <a:t>6/12/26</a:t>
             </a:fld>
             <a:endParaRPr lang="en-US"/>
           </a:p>
@@ -1908,7 +1908,7 @@
           <a:p>
             <a:fld id="{5BCAD085-E8A6-8845-BD4E-CB4CCA059FC4}" type="datetimeFigureOut">
               <a:rPr lang="en-US" smtClean="0"/>
-              <a:t>6/9/26</a:t>
+              <a:t>6/12/26</a:t>
             </a:fld>
             <a:endParaRPr lang="en-US"/>
           </a:p>
@@ -2003,7 +2003,7 @@
           <a:p>
             <a:fld id="{5BCAD085-E8A6-8845-BD4E-CB4CCA059FC4}" type="datetimeFigureOut">
               <a:rPr lang="en-US" smtClean="0"/>
-              <a:t>6/9/26</a:t>
+              <a:t>6/12/26</a:t>
             </a:fld>
             <a:endParaRPr lang="en-US"/>
           </a:p>
@@ -2278,7 +2278,7 @@
           <a:p>
             <a:fld id="{5BCAD085-E8A6-8845-BD4E-CB4CCA059FC4}" type="datetimeFigureOut">
               <a:rPr lang="en-US" smtClean="0"/>
-              <a:t>6/9/26</a:t>
+              <a:t>6/12/26</a:t>
             </a:fld>
             <a:endParaRPr lang="en-US"/>
           </a:p>
@@ -2530,7 +2530,7 @@
           <a:p>
             <a:fld id="{5BCAD085-E8A6-8845-BD4E-CB4CCA059FC4}" type="datetimeFigureOut">
               <a:rPr lang="en-US" smtClean="0"/>
-              <a:t>6/9/26</a:t>
+              <a:t>6/12/26</a:t>
             </a:fld>
             <a:endParaRPr lang="en-US"/>
           </a:p>
@@ -2741,7 +2741,7 @@
           <a:p>
             <a:fld id="{5BCAD085-E8A6-8845-BD4E-CB4CCA059FC4}" type="datetimeFigureOut">
               <a:rPr lang="en-US" smtClean="0"/>
-              <a:t>6/9/26</a:t>
+              <a:t>6/12/26</a:t>
             </a:fld>
             <a:endParaRPr lang="en-US"/>
           </a:p>
@@ -16019,7 +16019,7 @@
         </p:spPr>
         <p:txBody>
           <a:bodyPr>
-            <a:normAutofit/>
+            <a:normAutofit lnSpcReduction="10000"/>
           </a:bodyPr>
           <a:lstStyle/>
           <a:p>
@@ -16074,8 +16074,19 @@
                 <a:latin typeface="Times New Roman" panose="02020603050405020304" pitchFamily="18" charset="0"/>
                 <a:cs typeface="Times New Roman" panose="02020603050405020304" pitchFamily="18" charset="0"/>
               </a:rPr>
-              <a:t> to train your models and evaluate. Total budget for modal is $1000. Experiment with smaller subset of data and fewer parameter in the model to do experiments quickly and then extrapolate.</a:t>
-            </a:r>
+              <a:t> to train your models and evaluate. Total budget for modal is $1000. Experiment with smaller subset of data and fewer parameter in the model to do experiments quickly and then extrapolate.  Use internet search extensively at every step.  Do not STOP until accuracy reaches 95% and you can process each row in </a:t>
+            </a:r>
+            <a:r>
+              <a:rPr lang="en-US" sz="2800">
+                <a:latin typeface="Times New Roman" panose="02020603050405020304" pitchFamily="18" charset="0"/>
+                <a:cs typeface="Times New Roman" panose="02020603050405020304" pitchFamily="18" charset="0"/>
+              </a:rPr>
+              <a:t>less than 50ms.</a:t>
+            </a:r>
+            <a:endParaRPr lang="en-US" sz="2800" dirty="0">
+              <a:latin typeface="Times New Roman" panose="02020603050405020304" pitchFamily="18" charset="0"/>
+              <a:cs typeface="Times New Roman" panose="02020603050405020304" pitchFamily="18" charset="0"/>
+            </a:endParaRPr>
           </a:p>
         </p:txBody>
       </p:sp>

--- a/papers/sekisssorcar/se_kiss_sorcar_slides.pptx
+++ b/papers/sekisssorcar/se_kiss_sorcar_slides.pptx
@@ -3908,6 +3908,36 @@
           </a:prstGeom>
         </p:spPr>
       </p:pic>
+      <p:pic>
+        <p:nvPicPr>
+          <p:cNvPr id="9" name="Picture 8" descr="A QR Code">
+            <a:extLst>
+              <a:ext uri="{FF2B5EF4-FFF2-40B4-BE49-F238E27FC236}">
+                <a16:creationId xmlns:a16="http://schemas.microsoft.com/office/drawing/2014/main" id="{5EE03E55-29EA-69BD-29ED-9B5D04212B9C}"/>
+              </a:ext>
+            </a:extLst>
+          </p:cNvPr>
+          <p:cNvPicPr>
+            <a:picLocks noChangeAspect="1"/>
+          </p:cNvPicPr>
+          <p:nvPr/>
+        </p:nvPicPr>
+        <p:blipFill>
+          <a:blip r:embed="rId3"/>
+          <a:stretch>
+            <a:fillRect/>
+          </a:stretch>
+        </p:blipFill>
+        <p:spPr>
+          <a:xfrm>
+            <a:off x="10490200" y="2240280"/>
+            <a:ext cx="1503680" cy="1503680"/>
+          </a:xfrm>
+          <a:prstGeom prst="rect">
+            <a:avLst/>
+          </a:prstGeom>
+        </p:spPr>
+      </p:pic>
     </p:spTree>
   </p:cSld>
   <p:clrMapOvr>
@@ -5887,14 +5917,6 @@
 <file path=ppt/slides/slide13.xml><?xml version="1.0" encoding="utf-8"?>
 <p:sld xmlns:a="http://schemas.openxmlformats.org/drawingml/2006/main" xmlns:r="http://schemas.openxmlformats.org/officeDocument/2006/relationships" xmlns:p="http://schemas.openxmlformats.org/presentationml/2006/main">
   <p:cSld>
-    <p:bg>
-      <p:bgPr>
-        <a:solidFill>
-          <a:srgbClr val="F7F5EF"/>
-        </a:solidFill>
-        <a:effectLst/>
-      </p:bgPr>
-    </p:bg>
     <p:spTree>
       <p:nvGrpSpPr>
         <p:cNvPr id="1" name=""/>
@@ -6313,6 +6335,11 @@
         </p:txBody>
       </p:sp>
     </p:spTree>
+    <p:extLst>
+      <p:ext uri="{BB962C8B-B14F-4D97-AF65-F5344CB8AC3E}">
+        <p14:creationId xmlns:p14="http://schemas.microsoft.com/office/powerpoint/2010/main" val="2879443887"/>
+      </p:ext>
+    </p:extLst>
   </p:cSld>
   <p:clrMapOvr>
     <a:masterClrMapping/>
@@ -6323,14 +6350,6 @@
 <file path=ppt/slides/slide14.xml><?xml version="1.0" encoding="utf-8"?>
 <p:sld xmlns:a="http://schemas.openxmlformats.org/drawingml/2006/main" xmlns:r="http://schemas.openxmlformats.org/officeDocument/2006/relationships" xmlns:p="http://schemas.openxmlformats.org/presentationml/2006/main">
   <p:cSld>
-    <p:bg>
-      <p:bgPr>
-        <a:solidFill>
-          <a:srgbClr val="F7F5EF"/>
-        </a:solidFill>
-        <a:effectLst/>
-      </p:bgPr>
-    </p:bg>
     <p:spTree>
       <p:nvGrpSpPr>
         <p:cNvPr id="1" name=""/>
@@ -6697,6 +6716,11 @@
         </p:txBody>
       </p:sp>
     </p:spTree>
+    <p:extLst>
+      <p:ext uri="{BB962C8B-B14F-4D97-AF65-F5344CB8AC3E}">
+        <p14:creationId xmlns:p14="http://schemas.microsoft.com/office/powerpoint/2010/main" val="389597333"/>
+      </p:ext>
+    </p:extLst>
   </p:cSld>
   <p:clrMapOvr>
     <a:masterClrMapping/>
@@ -21034,6 +21058,36 @@
           </a:p>
         </p:txBody>
       </p:sp>
+      <p:pic>
+        <p:nvPicPr>
+          <p:cNvPr id="7" name="Picture 6" descr="A QR Code">
+            <a:extLst>
+              <a:ext uri="{FF2B5EF4-FFF2-40B4-BE49-F238E27FC236}">
+                <a16:creationId xmlns:a16="http://schemas.microsoft.com/office/drawing/2014/main" id="{06955F7C-3B70-51DF-76F4-B154AEE9E2DF}"/>
+              </a:ext>
+            </a:extLst>
+          </p:cNvPr>
+          <p:cNvPicPr>
+            <a:picLocks noChangeAspect="1"/>
+          </p:cNvPicPr>
+          <p:nvPr/>
+        </p:nvPicPr>
+        <p:blipFill>
+          <a:blip r:embed="rId3"/>
+          <a:stretch>
+            <a:fillRect/>
+          </a:stretch>
+        </p:blipFill>
+        <p:spPr>
+          <a:xfrm>
+            <a:off x="10567939" y="114560"/>
+            <a:ext cx="1531359" cy="1531359"/>
+          </a:xfrm>
+          <a:prstGeom prst="rect">
+            <a:avLst/>
+          </a:prstGeom>
+        </p:spPr>
+      </p:pic>
     </p:spTree>
   </p:cSld>
   <p:clrMapOvr>
